--- a/Shreyas META SQL Project.pptx
+++ b/Shreyas META SQL Project.pptx
@@ -117,6 +117,11 @@
       </a:defRPr>
     </a:lvl9pPr>
   </p:defaultTextStyle>
+  <p:extLst>
+    <p:ext uri="{EFAFB233-063F-42B5-8137-9DF3F51BA10A}">
+      <p15:sldGuideLst xmlns:p15="http://schemas.microsoft.com/office/powerpoint/2012/main"/>
+    </p:ext>
+  </p:extLst>
 </p:presentation>
 </file>
 
@@ -2038,19 +2043,13 @@
           <a:lstStyle/>
           <a:p>
             <a:pPr>
-              <a:defRPr sz="1600" b="1" i="0" u="none" strike="noStrike" kern="1200" spc="100" baseline="0">
+              <a:defRPr sz="2200" b="1" i="0" u="none" strike="noStrike" kern="1200" cap="all" spc="50" baseline="0">
                 <a:solidFill>
-                  <a:schemeClr val="lt1">
-                    <a:lumMod val="95000"/>
+                  <a:schemeClr val="tx1">
+                    <a:lumMod val="65000"/>
+                    <a:lumOff val="35000"/>
                   </a:schemeClr>
                 </a:solidFill>
-                <a:effectLst>
-                  <a:outerShdw blurRad="50800" dist="38100" dir="5400000" algn="t" rotWithShape="0">
-                    <a:prstClr val="black">
-                      <a:alpha val="40000"/>
-                    </a:prstClr>
-                  </a:outerShdw>
-                </a:effectLst>
                 <a:latin typeface="+mn-lt"/>
                 <a:ea typeface="+mn-ea"/>
                 <a:cs typeface="+mn-cs"/>
@@ -2076,19 +2075,13 @@
         <a:lstStyle/>
         <a:p>
           <a:pPr>
-            <a:defRPr sz="1600" b="1" i="0" u="none" strike="noStrike" kern="1200" spc="100" baseline="0">
+            <a:defRPr sz="2200" b="1" i="0" u="none" strike="noStrike" kern="1200" cap="all" spc="50" baseline="0">
               <a:solidFill>
-                <a:schemeClr val="lt1">
-                  <a:lumMod val="95000"/>
+                <a:schemeClr val="tx1">
+                  <a:lumMod val="65000"/>
+                  <a:lumOff val="35000"/>
                 </a:schemeClr>
               </a:solidFill>
-              <a:effectLst>
-                <a:outerShdw blurRad="50800" dist="38100" dir="5400000" algn="t" rotWithShape="0">
-                  <a:prstClr val="black">
-                    <a:alpha val="40000"/>
-                  </a:prstClr>
-                </a:outerShdw>
-              </a:effectLst>
               <a:latin typeface="+mn-lt"/>
               <a:ea typeface="+mn-ea"/>
               <a:cs typeface="+mn-cs"/>
@@ -2159,28 +2152,15 @@
             </c:strRef>
           </c:tx>
           <c:spPr>
-            <a:gradFill rotWithShape="1">
+            <a:gradFill>
               <a:gsLst>
-                <a:gs pos="0">
+                <a:gs pos="100000">
                   <a:schemeClr val="accent1">
-                    <a:satMod val="103000"/>
-                    <a:lumMod val="102000"/>
-                    <a:tint val="94000"/>
+                    <a:alpha val="0"/>
                   </a:schemeClr>
                 </a:gs>
                 <a:gs pos="50000">
-                  <a:schemeClr val="accent1">
-                    <a:satMod val="110000"/>
-                    <a:lumMod val="100000"/>
-                    <a:shade val="100000"/>
-                  </a:schemeClr>
-                </a:gs>
-                <a:gs pos="100000">
-                  <a:schemeClr val="accent1">
-                    <a:lumMod val="99000"/>
-                    <a:satMod val="120000"/>
-                    <a:shade val="78000"/>
-                  </a:schemeClr>
+                  <a:schemeClr val="accent1"/>
                 </a:gs>
               </a:gsLst>
               <a:lin ang="5400000" scaled="0"/>
@@ -2188,13 +2168,7 @@
             <a:ln>
               <a:noFill/>
             </a:ln>
-            <a:effectLst>
-              <a:outerShdw blurRad="57150" dist="19050" dir="5400000" algn="ctr" rotWithShape="0">
-                <a:srgbClr val="000000">
-                  <a:alpha val="63000"/>
-                </a:srgbClr>
-              </a:outerShdw>
-            </a:effectLst>
+            <a:effectLst/>
             <a:sp3d/>
           </c:spPr>
           <c:invertIfNegative val="0"/>
@@ -2213,10 +2187,11 @@
               <a:lstStyle/>
               <a:p>
                 <a:pPr>
-                  <a:defRPr sz="900" b="0" i="0" u="none" strike="noStrike" kern="1200" baseline="0">
+                  <a:defRPr sz="1197" b="0" i="0" u="none" strike="noStrike" kern="1200" baseline="0">
                     <a:solidFill>
-                      <a:schemeClr val="lt1">
-                        <a:lumMod val="85000"/>
+                      <a:schemeClr val="tx1">
+                        <a:lumMod val="75000"/>
+                        <a:lumOff val="25000"/>
                       </a:schemeClr>
                     </a:solidFill>
                     <a:latin typeface="+mn-lt"/>
@@ -2241,9 +2216,9 @@
                   <c:spPr>
                     <a:ln w="9525">
                       <a:solidFill>
-                        <a:schemeClr val="lt1">
-                          <a:lumMod val="95000"/>
-                          <a:alpha val="54000"/>
+                        <a:schemeClr val="tx1">
+                          <a:lumMod val="35000"/>
+                          <a:lumOff val="65000"/>
                         </a:schemeClr>
                       </a:solidFill>
                     </a:ln>
@@ -2352,6 +2327,7 @@
           <c:showBubbleSize val="0"/>
         </c:dLbls>
         <c:gapWidth val="150"/>
+        <c:gapDepth val="0"/>
         <c:shape val="box"/>
         <c:axId val="1016750192"/>
         <c:axId val="1016742032"/>
@@ -2371,10 +2347,11 @@
               <a:lstStyle/>
               <a:p>
                 <a:pPr>
-                  <a:defRPr sz="900" b="1" i="0" u="none" strike="noStrike" kern="1200" cap="all" baseline="0">
+                  <a:defRPr sz="1197" b="0" i="0" u="none" strike="noStrike" kern="1200" cap="all" baseline="0">
                     <a:solidFill>
-                      <a:schemeClr val="lt1">
-                        <a:lumMod val="85000"/>
+                      <a:schemeClr val="tx1">
+                        <a:lumMod val="65000"/>
+                        <a:lumOff val="35000"/>
                       </a:schemeClr>
                     </a:solidFill>
                     <a:latin typeface="+mn-lt"/>
@@ -2402,10 +2379,11 @@
             <a:lstStyle/>
             <a:p>
               <a:pPr>
-                <a:defRPr sz="900" b="1" i="0" u="none" strike="noStrike" kern="1200" cap="all" baseline="0">
+                <a:defRPr sz="1197" b="0" i="0" u="none" strike="noStrike" kern="1200" cap="all" baseline="0">
                   <a:solidFill>
-                    <a:schemeClr val="lt1">
-                      <a:lumMod val="85000"/>
+                    <a:schemeClr val="tx1">
+                      <a:lumMod val="65000"/>
+                      <a:lumOff val="35000"/>
                     </a:schemeClr>
                   </a:solidFill>
                   <a:latin typeface="+mn-lt"/>
@@ -2433,10 +2411,11 @@
           <a:lstStyle/>
           <a:p>
             <a:pPr>
-              <a:defRPr sz="900" b="0" i="0" u="none" strike="noStrike" kern="1200" baseline="0">
+              <a:defRPr sz="1197" b="0" i="0" u="none" strike="noStrike" kern="1200" baseline="0">
                 <a:solidFill>
-                  <a:schemeClr val="lt1">
-                    <a:lumMod val="85000"/>
+                  <a:schemeClr val="tx1">
+                    <a:lumMod val="65000"/>
+                    <a:lumOff val="35000"/>
                   </a:schemeClr>
                 </a:solidFill>
                 <a:latin typeface="+mn-lt"/>
@@ -2465,9 +2444,9 @@
           <c:spPr>
             <a:ln w="9525" cap="flat" cmpd="sng" algn="ctr">
               <a:solidFill>
-                <a:schemeClr val="dk1">
-                  <a:lumMod val="50000"/>
-                  <a:lumOff val="50000"/>
+                <a:schemeClr val="tx1">
+                  <a:lumMod val="5000"/>
+                  <a:lumOff val="95000"/>
                 </a:schemeClr>
               </a:solidFill>
               <a:round/>
@@ -2482,10 +2461,11 @@
               <a:lstStyle/>
               <a:p>
                 <a:pPr>
-                  <a:defRPr sz="900" b="1" i="0" u="none" strike="noStrike" kern="1200" cap="all" baseline="0">
+                  <a:defRPr sz="1197" b="0" i="0" u="none" strike="noStrike" kern="1200" cap="all" baseline="0">
                     <a:solidFill>
-                      <a:schemeClr val="lt1">
-                        <a:lumMod val="85000"/>
+                      <a:schemeClr val="tx1">
+                        <a:lumMod val="65000"/>
+                        <a:lumOff val="35000"/>
                       </a:schemeClr>
                     </a:solidFill>
                     <a:latin typeface="+mn-lt"/>
@@ -2513,10 +2493,11 @@
             <a:lstStyle/>
             <a:p>
               <a:pPr>
-                <a:defRPr sz="900" b="1" i="0" u="none" strike="noStrike" kern="1200" cap="all" baseline="0">
+                <a:defRPr sz="1197" b="0" i="0" u="none" strike="noStrike" kern="1200" cap="all" baseline="0">
                   <a:solidFill>
-                    <a:schemeClr val="lt1">
-                      <a:lumMod val="85000"/>
+                    <a:schemeClr val="tx1">
+                      <a:lumMod val="65000"/>
+                      <a:lumOff val="35000"/>
                     </a:schemeClr>
                   </a:solidFill>
                   <a:latin typeface="+mn-lt"/>
@@ -2544,10 +2525,11 @@
           <a:lstStyle/>
           <a:p>
             <a:pPr>
-              <a:defRPr sz="900" b="0" i="0" u="none" strike="noStrike" kern="1200" baseline="0">
+              <a:defRPr sz="1197" b="0" i="0" u="none" strike="noStrike" kern="1200" baseline="0">
                 <a:solidFill>
-                  <a:schemeClr val="lt1">
-                    <a:lumMod val="85000"/>
+                  <a:schemeClr val="tx1">
+                    <a:lumMod val="65000"/>
+                    <a:lumOff val="35000"/>
                   </a:schemeClr>
                 </a:solidFill>
                 <a:latin typeface="+mn-lt"/>
@@ -2575,26 +2557,7 @@
     <c:showDLblsOverMax val="0"/>
   </c:chart>
   <c:spPr>
-    <a:gradFill flip="none" rotWithShape="1">
-      <a:gsLst>
-        <a:gs pos="0">
-          <a:schemeClr val="dk1">
-            <a:lumMod val="65000"/>
-            <a:lumOff val="35000"/>
-          </a:schemeClr>
-        </a:gs>
-        <a:gs pos="100000">
-          <a:schemeClr val="dk1">
-            <a:lumMod val="85000"/>
-            <a:lumOff val="15000"/>
-          </a:schemeClr>
-        </a:gs>
-      </a:gsLst>
-      <a:path path="circle">
-        <a:fillToRect l="50000" t="50000" r="50000" b="50000"/>
-      </a:path>
-      <a:tileRect/>
-    </a:gradFill>
+    <a:noFill/>
     <a:ln>
       <a:noFill/>
     </a:ln>
@@ -4460,16 +4423,16 @@
           <a:lstStyle/>
           <a:p>
             <a:pPr>
-              <a:defRPr sz="1800" b="1" i="0" u="none" strike="noStrike" kern="1200" baseline="0">
+              <a:defRPr sz="2128" b="0" i="0" u="none" strike="noStrike" kern="1200" cap="none" spc="50" normalizeH="0" baseline="0">
                 <a:solidFill>
-                  <a:schemeClr val="dk1">
-                    <a:lumMod val="75000"/>
-                    <a:lumOff val="25000"/>
+                  <a:schemeClr val="tx1">
+                    <a:lumMod val="65000"/>
+                    <a:lumOff val="35000"/>
                   </a:schemeClr>
                 </a:solidFill>
-                <a:latin typeface="+mn-lt"/>
-                <a:ea typeface="+mn-ea"/>
-                <a:cs typeface="+mn-cs"/>
+                <a:latin typeface="+mj-lt"/>
+                <a:ea typeface="+mj-ea"/>
+                <a:cs typeface="+mj-cs"/>
               </a:defRPr>
             </a:pPr>
             <a:r>
@@ -4492,16 +4455,16 @@
         <a:lstStyle/>
         <a:p>
           <a:pPr>
-            <a:defRPr sz="1800" b="1" i="0" u="none" strike="noStrike" kern="1200" baseline="0">
+            <a:defRPr sz="2128" b="0" i="0" u="none" strike="noStrike" kern="1200" cap="none" spc="50" normalizeH="0" baseline="0">
               <a:solidFill>
-                <a:schemeClr val="dk1">
-                  <a:lumMod val="75000"/>
-                  <a:lumOff val="25000"/>
+                <a:schemeClr val="tx1">
+                  <a:lumMod val="65000"/>
+                  <a:lumOff val="35000"/>
                 </a:schemeClr>
               </a:solidFill>
-              <a:latin typeface="+mn-lt"/>
-              <a:ea typeface="+mn-ea"/>
-              <a:cs typeface="+mn-cs"/>
+              <a:latin typeface="+mj-lt"/>
+              <a:ea typeface="+mj-ea"/>
+              <a:cs typeface="+mj-cs"/>
             </a:defRPr>
           </a:pPr>
           <a:endParaRPr lang="en-IN"/>
@@ -4532,16 +4495,11 @@
           <c:spPr>
             <a:solidFill>
               <a:schemeClr val="accent1">
-                <a:alpha val="85000"/>
+                <a:alpha val="70000"/>
               </a:schemeClr>
             </a:solidFill>
-            <a:ln w="9525" cap="flat" cmpd="sng" algn="ctr">
-              <a:solidFill>
-                <a:schemeClr val="lt1">
-                  <a:alpha val="50000"/>
-                </a:schemeClr>
-              </a:solidFill>
-              <a:round/>
+            <a:ln>
+              <a:noFill/>
             </a:ln>
             <a:effectLst/>
           </c:spPr>
@@ -4561,9 +4519,12 @@
               <a:lstStyle/>
               <a:p>
                 <a:pPr>
-                  <a:defRPr sz="900" b="1" i="0" u="none" strike="noStrike" kern="1200" baseline="0">
+                  <a:defRPr sz="1197" b="0" i="0" u="none" strike="noStrike" kern="1200" baseline="0">
                     <a:solidFill>
-                      <a:schemeClr val="lt1"/>
+                      <a:schemeClr val="tx1">
+                        <a:lumMod val="75000"/>
+                        <a:lumOff val="25000"/>
+                      </a:schemeClr>
                     </a:solidFill>
                     <a:latin typeface="+mn-lt"/>
                     <a:ea typeface="+mn-ea"/>
@@ -4588,9 +4549,9 @@
                   <c:spPr>
                     <a:ln w="9525">
                       <a:solidFill>
-                        <a:schemeClr val="dk1">
-                          <a:lumMod val="50000"/>
-                          <a:lumOff val="50000"/>
+                        <a:schemeClr val="tx1">
+                          <a:lumMod val="35000"/>
+                          <a:lumOff val="65000"/>
                         </a:schemeClr>
                       </a:solidFill>
                     </a:ln>
@@ -4752,7 +4713,8 @@
           <c:showPercent val="0"/>
           <c:showBubbleSize val="0"/>
         </c:dLbls>
-        <c:gapWidth val="65"/>
+        <c:gapWidth val="80"/>
+        <c:overlap val="25"/>
         <c:axId val="2006949072"/>
         <c:axId val="2006950512"/>
       </c:barChart>
@@ -4770,11 +4732,11 @@
               <a:lstStyle/>
               <a:p>
                 <a:pPr>
-                  <a:defRPr sz="900" b="1" i="0" u="none" strike="noStrike" kern="1200" baseline="0">
+                  <a:defRPr sz="1197" b="0" i="0" u="none" strike="noStrike" kern="1200" cap="all" baseline="0">
                     <a:solidFill>
-                      <a:schemeClr val="dk1">
-                        <a:lumMod val="75000"/>
-                        <a:lumOff val="25000"/>
+                      <a:schemeClr val="tx1">
+                        <a:lumMod val="65000"/>
+                        <a:lumOff val="35000"/>
                       </a:schemeClr>
                     </a:solidFill>
                     <a:latin typeface="+mn-lt"/>
@@ -4810,11 +4772,11 @@
             <a:lstStyle/>
             <a:p>
               <a:pPr>
-                <a:defRPr sz="900" b="1" i="0" u="none" strike="noStrike" kern="1200" baseline="0">
+                <a:defRPr sz="1197" b="0" i="0" u="none" strike="noStrike" kern="1200" cap="all" baseline="0">
                   <a:solidFill>
-                    <a:schemeClr val="dk1">
-                      <a:lumMod val="75000"/>
-                      <a:lumOff val="25000"/>
+                    <a:schemeClr val="tx1">
+                      <a:lumMod val="65000"/>
+                      <a:lumOff val="35000"/>
                     </a:schemeClr>
                   </a:solidFill>
                   <a:latin typeface="+mn-lt"/>
@@ -4832,11 +4794,11 @@
         <c:tickLblPos val="nextTo"/>
         <c:spPr>
           <a:noFill/>
-          <a:ln w="19050" cap="flat" cmpd="sng" algn="ctr">
+          <a:ln w="15875" cap="flat" cmpd="sng" algn="ctr">
             <a:solidFill>
-              <a:schemeClr val="dk1">
-                <a:lumMod val="75000"/>
-                <a:lumOff val="25000"/>
+              <a:schemeClr val="tx1">
+                <a:lumMod val="25000"/>
+                <a:lumOff val="75000"/>
               </a:schemeClr>
             </a:solidFill>
             <a:round/>
@@ -4848,11 +4810,11 @@
           <a:lstStyle/>
           <a:p>
             <a:pPr>
-              <a:defRPr sz="900" b="0" i="0" u="none" strike="noStrike" kern="1200" cap="all" baseline="0">
+              <a:defRPr sz="1197" b="0" i="0" u="none" strike="noStrike" kern="1200" cap="none" spc="20" normalizeH="0" baseline="0">
                 <a:solidFill>
-                  <a:schemeClr val="dk1">
-                    <a:lumMod val="75000"/>
-                    <a:lumOff val="25000"/>
+                  <a:schemeClr val="tx1">
+                    <a:lumMod val="65000"/>
+                    <a:lumOff val="35000"/>
                   </a:schemeClr>
                 </a:solidFill>
                 <a:latin typeface="+mn-lt"/>
@@ -4875,29 +4837,17 @@
         <c:scaling>
           <c:orientation val="minMax"/>
         </c:scaling>
-        <c:delete val="1"/>
+        <c:delete val="0"/>
         <c:axPos val="l"/>
         <c:majorGridlines>
           <c:spPr>
             <a:ln w="9525" cap="flat" cmpd="sng" algn="ctr">
-              <a:gradFill>
-                <a:gsLst>
-                  <a:gs pos="100000">
-                    <a:schemeClr val="dk1">
-                      <a:lumMod val="95000"/>
-                      <a:lumOff val="5000"/>
-                      <a:alpha val="42000"/>
-                    </a:schemeClr>
-                  </a:gs>
-                  <a:gs pos="0">
-                    <a:schemeClr val="lt1">
-                      <a:lumMod val="75000"/>
-                      <a:alpha val="36000"/>
-                    </a:schemeClr>
-                  </a:gs>
-                </a:gsLst>
-                <a:lin ang="5400000" scaled="0"/>
-              </a:gradFill>
+              <a:solidFill>
+                <a:schemeClr val="tx1">
+                  <a:lumMod val="5000"/>
+                  <a:lumOff val="95000"/>
+                </a:schemeClr>
+              </a:solidFill>
               <a:round/>
             </a:ln>
             <a:effectLst/>
@@ -4907,6 +4857,33 @@
         <c:majorTickMark val="none"/>
         <c:minorTickMark val="none"/>
         <c:tickLblPos val="nextTo"/>
+        <c:spPr>
+          <a:noFill/>
+          <a:ln>
+            <a:noFill/>
+          </a:ln>
+          <a:effectLst/>
+        </c:spPr>
+        <c:txPr>
+          <a:bodyPr rot="-60000000" spcFirstLastPara="1" vertOverflow="ellipsis" vert="horz" wrap="square" anchor="ctr" anchorCtr="1"/>
+          <a:lstStyle/>
+          <a:p>
+            <a:pPr>
+              <a:defRPr sz="1197" b="0" i="0" u="none" strike="noStrike" kern="1200" spc="20" baseline="0">
+                <a:solidFill>
+                  <a:schemeClr val="tx1">
+                    <a:lumMod val="65000"/>
+                    <a:lumOff val="35000"/>
+                  </a:schemeClr>
+                </a:solidFill>
+                <a:latin typeface="+mn-lt"/>
+                <a:ea typeface="+mn-ea"/>
+                <a:cs typeface="+mn-cs"/>
+              </a:defRPr>
+            </a:pPr>
+            <a:endParaRPr lang="en-US"/>
+          </a:p>
+        </c:txPr>
         <c:crossAx val="2006949072"/>
         <c:crosses val="autoZero"/>
         <c:crossBetween val="between"/>
@@ -4924,33 +4901,9 @@
     <c:showDLblsOverMax val="0"/>
   </c:chart>
   <c:spPr>
-    <a:gradFill flip="none" rotWithShape="1">
-      <a:gsLst>
-        <a:gs pos="0">
-          <a:schemeClr val="lt1"/>
-        </a:gs>
-        <a:gs pos="39000">
-          <a:schemeClr val="lt1"/>
-        </a:gs>
-        <a:gs pos="100000">
-          <a:schemeClr val="lt1">
-            <a:lumMod val="75000"/>
-          </a:schemeClr>
-        </a:gs>
-      </a:gsLst>
-      <a:path path="circle">
-        <a:fillToRect l="50000" t="-80000" r="50000" b="180000"/>
-      </a:path>
-      <a:tileRect/>
-    </a:gradFill>
-    <a:ln w="9525" cap="flat" cmpd="sng" algn="ctr">
-      <a:solidFill>
-        <a:schemeClr val="dk1">
-          <a:lumMod val="25000"/>
-          <a:lumOff val="75000"/>
-        </a:schemeClr>
-      </a:solidFill>
-      <a:round/>
+    <a:noFill/>
+    <a:ln>
+      <a:noFill/>
     </a:ln>
     <a:effectLst/>
   </c:spPr>
@@ -6246,31 +6199,33 @@
 </file>
 
 <file path=ppt/charts/style3.xml><?xml version="1.0" encoding="utf-8"?>
-<cs:chartStyle xmlns:cs="http://schemas.microsoft.com/office/drawing/2012/chartStyle" xmlns:a="http://schemas.openxmlformats.org/drawingml/2006/main" id="294">
+<cs:chartStyle xmlns:cs="http://schemas.microsoft.com/office/drawing/2012/chartStyle" xmlns:a="http://schemas.openxmlformats.org/drawingml/2006/main" id="293">
   <cs:axisTitle>
     <cs:lnRef idx="0"/>
     <cs:fillRef idx="0"/>
     <cs:effectRef idx="0"/>
     <cs:fontRef idx="minor">
-      <a:schemeClr val="lt1">
-        <a:lumMod val="85000"/>
+      <a:schemeClr val="tx1">
+        <a:lumMod val="65000"/>
+        <a:lumOff val="35000"/>
       </a:schemeClr>
     </cs:fontRef>
-    <cs:defRPr sz="900" b="1" kern="1200" cap="all"/>
+    <cs:defRPr sz="1197" kern="1200" cap="all"/>
   </cs:axisTitle>
   <cs:categoryAxis>
     <cs:lnRef idx="0"/>
     <cs:fillRef idx="0"/>
     <cs:effectRef idx="0"/>
     <cs:fontRef idx="minor">
-      <a:schemeClr val="lt1">
-        <a:lumMod val="85000"/>
+      <a:schemeClr val="tx1">
+        <a:lumMod val="65000"/>
+        <a:lumOff val="35000"/>
       </a:schemeClr>
     </cs:fontRef>
     <cs:spPr/>
-    <cs:defRPr sz="900" kern="1200"/>
+    <cs:defRPr sz="1197" kern="1200"/>
   </cs:categoryAxis>
-  <cs:chartArea>
+  <cs:chartArea mods="allowNoFillOverride allowNoLineOverride">
     <cs:lnRef idx="0"/>
     <cs:fillRef idx="0"/>
     <cs:effectRef idx="0"/>
@@ -6278,91 +6233,128 @@
       <a:schemeClr val="dk1"/>
     </cs:fontRef>
     <cs:spPr>
-      <a:gradFill flip="none" rotWithShape="1">
-        <a:gsLst>
-          <a:gs pos="0">
-            <a:schemeClr val="dk1">
-              <a:lumMod val="65000"/>
-              <a:lumOff val="35000"/>
-            </a:schemeClr>
-          </a:gs>
-          <a:gs pos="100000">
-            <a:schemeClr val="dk1">
-              <a:lumMod val="85000"/>
-              <a:lumOff val="15000"/>
-            </a:schemeClr>
-          </a:gs>
-        </a:gsLst>
-        <a:path path="circle">
-          <a:fillToRect l="50000" t="50000" r="50000" b="50000"/>
-        </a:path>
-        <a:tileRect/>
-      </a:gradFill>
+      <a:solidFill>
+        <a:schemeClr val="bg1"/>
+      </a:solidFill>
+      <a:ln w="9525" cap="flat" cmpd="sng" algn="ctr">
+        <a:solidFill>
+          <a:schemeClr val="tx1">
+            <a:lumMod val="15000"/>
+            <a:lumOff val="85000"/>
+          </a:schemeClr>
+        </a:solidFill>
+        <a:round/>
+      </a:ln>
     </cs:spPr>
-    <cs:defRPr sz="1000" kern="1200"/>
+    <cs:defRPr sz="1197" kern="1200"/>
   </cs:chartArea>
   <cs:dataLabel>
     <cs:lnRef idx="0"/>
     <cs:fillRef idx="0"/>
     <cs:effectRef idx="0"/>
     <cs:fontRef idx="minor">
-      <a:schemeClr val="lt1">
-        <a:lumMod val="85000"/>
+      <a:schemeClr val="tx1">
+        <a:lumMod val="75000"/>
+        <a:lumOff val="25000"/>
       </a:schemeClr>
     </cs:fontRef>
-    <cs:defRPr sz="900" kern="1200"/>
+    <cs:defRPr sz="1197" kern="1200"/>
   </cs:dataLabel>
   <cs:dataLabelCallout>
     <cs:lnRef idx="0"/>
     <cs:fillRef idx="0"/>
     <cs:effectRef idx="0"/>
     <cs:fontRef idx="minor">
-      <a:schemeClr val="dk1">
-        <a:lumMod val="65000"/>
-        <a:lumOff val="35000"/>
-      </a:schemeClr>
+      <a:schemeClr val="bg1"/>
     </cs:fontRef>
     <cs:spPr>
       <a:solidFill>
-        <a:schemeClr val="lt1"/>
+        <a:schemeClr val="tx1">
+          <a:lumMod val="50000"/>
+          <a:lumOff val="50000"/>
+        </a:schemeClr>
       </a:solidFill>
     </cs:spPr>
-    <cs:defRPr sz="900" kern="1200"/>
+    <cs:defRPr sz="1197" kern="1200"/>
     <cs:bodyPr rot="0" spcFirstLastPara="1" vertOverflow="clip" horzOverflow="clip" vert="horz" wrap="square" lIns="36576" tIns="18288" rIns="36576" bIns="18288" anchor="ctr" anchorCtr="1">
       <a:spAutoFit/>
     </cs:bodyPr>
   </cs:dataLabelCallout>
   <cs:dataPoint>
     <cs:lnRef idx="0"/>
-    <cs:fillRef idx="3">
+    <cs:fillRef idx="0">
       <cs:styleClr val="auto"/>
     </cs:fillRef>
-    <cs:effectRef idx="3"/>
-    <cs:fontRef idx="minor">
-      <a:schemeClr val="tx1"/>
-    </cs:fontRef>
+    <cs:effectRef idx="0"/>
+    <cs:fontRef idx="minor">
+      <a:schemeClr val="dk1"/>
+    </cs:fontRef>
+    <cs:spPr>
+      <a:gradFill flip="none" rotWithShape="1">
+        <a:gsLst>
+          <a:gs pos="0">
+            <a:schemeClr val="phClr"/>
+          </a:gs>
+          <a:gs pos="75000">
+            <a:schemeClr val="phClr">
+              <a:lumMod val="60000"/>
+              <a:lumOff val="40000"/>
+            </a:schemeClr>
+          </a:gs>
+          <a:gs pos="51000">
+            <a:schemeClr val="phClr">
+              <a:alpha val="75000"/>
+            </a:schemeClr>
+          </a:gs>
+          <a:gs pos="100000">
+            <a:schemeClr val="phClr">
+              <a:lumMod val="20000"/>
+              <a:lumOff val="80000"/>
+              <a:alpha val="15000"/>
+            </a:schemeClr>
+          </a:gs>
+        </a:gsLst>
+        <a:lin ang="5400000" scaled="0"/>
+      </a:gradFill>
+    </cs:spPr>
   </cs:dataPoint>
   <cs:dataPoint3D>
     <cs:lnRef idx="0"/>
-    <cs:fillRef idx="3">
+    <cs:fillRef idx="0">
       <cs:styleClr val="auto"/>
     </cs:fillRef>
-    <cs:effectRef idx="3"/>
+    <cs:effectRef idx="0"/>
     <cs:fontRef idx="minor">
       <a:schemeClr val="tx1"/>
     </cs:fontRef>
+    <cs:spPr>
+      <a:gradFill>
+        <a:gsLst>
+          <a:gs pos="100000">
+            <a:schemeClr val="phClr">
+              <a:alpha val="0"/>
+            </a:schemeClr>
+          </a:gs>
+          <a:gs pos="50000">
+            <a:schemeClr val="phClr"/>
+          </a:gs>
+        </a:gsLst>
+        <a:lin ang="5400000" scaled="0"/>
+      </a:gradFill>
+      <a:sp3d/>
+    </cs:spPr>
   </cs:dataPoint3D>
   <cs:dataPointLine>
     <cs:lnRef idx="0">
       <cs:styleClr val="auto"/>
     </cs:lnRef>
-    <cs:fillRef idx="3"/>
-    <cs:effectRef idx="3"/>
-    <cs:fontRef idx="minor">
-      <a:schemeClr val="tx1"/>
+    <cs:fillRef idx="0"/>
+    <cs:effectRef idx="0"/>
+    <cs:fontRef idx="minor">
+      <a:schemeClr val="dk1"/>
     </cs:fontRef>
     <cs:spPr>
-      <a:ln w="34925" cap="rnd">
+      <a:ln w="28575" cap="rnd">
         <a:solidFill>
           <a:schemeClr val="phClr"/>
         </a:solidFill>
@@ -6374,17 +6366,45 @@
     <cs:lnRef idx="0">
       <cs:styleClr val="auto"/>
     </cs:lnRef>
-    <cs:fillRef idx="3">
+    <cs:fillRef idx="0">
       <cs:styleClr val="auto"/>
     </cs:fillRef>
-    <cs:effectRef idx="3"/>
-    <cs:fontRef idx="minor">
-      <a:schemeClr val="tx1"/>
+    <cs:effectRef idx="0"/>
+    <cs:fontRef idx="minor">
+      <a:schemeClr val="dk1"/>
     </cs:fontRef>
     <cs:spPr>
-      <a:ln w="9525">
+      <a:gradFill flip="none" rotWithShape="1">
+        <a:gsLst>
+          <a:gs pos="0">
+            <a:schemeClr val="phClr"/>
+          </a:gs>
+          <a:gs pos="75000">
+            <a:schemeClr val="phClr">
+              <a:lumMod val="60000"/>
+              <a:lumOff val="40000"/>
+            </a:schemeClr>
+          </a:gs>
+          <a:gs pos="51000">
+            <a:schemeClr val="phClr">
+              <a:alpha val="75000"/>
+            </a:schemeClr>
+          </a:gs>
+          <a:gs pos="100000">
+            <a:schemeClr val="phClr">
+              <a:lumMod val="20000"/>
+              <a:lumOff val="80000"/>
+              <a:alpha val="15000"/>
+            </a:schemeClr>
+          </a:gs>
+        </a:gsLst>
+        <a:lin ang="5400000" scaled="0"/>
+      </a:gradFill>
+      <a:ln w="9525" cap="flat" cmpd="sng" algn="ctr">
         <a:solidFill>
-          <a:schemeClr val="phClr"/>
+          <a:schemeClr val="phClr">
+            <a:shade val="95000"/>
+          </a:schemeClr>
         </a:solidFill>
         <a:round/>
       </a:ln>
@@ -6395,10 +6415,10 @@
     <cs:lnRef idx="0">
       <cs:styleClr val="auto"/>
     </cs:lnRef>
-    <cs:fillRef idx="3"/>
-    <cs:effectRef idx="3"/>
-    <cs:fontRef idx="minor">
-      <a:schemeClr val="tx1"/>
+    <cs:fillRef idx="0"/>
+    <cs:effectRef idx="0"/>
+    <cs:fontRef idx="minor">
+      <a:schemeClr val="dk1"/>
     </cs:fontRef>
     <cs:spPr>
       <a:ln w="9525" cap="rnd">
@@ -6414,28 +6434,29 @@
     <cs:fillRef idx="0"/>
     <cs:effectRef idx="0"/>
     <cs:fontRef idx="minor">
-      <a:schemeClr val="lt1">
-        <a:lumMod val="85000"/>
+      <a:schemeClr val="tx1">
+        <a:lumMod val="65000"/>
+        <a:lumOff val="35000"/>
       </a:schemeClr>
     </cs:fontRef>
     <cs:spPr>
       <a:ln w="9525">
         <a:solidFill>
-          <a:schemeClr val="lt1">
-            <a:lumMod val="95000"/>
-            <a:alpha val="54000"/>
+          <a:schemeClr val="tx1">
+            <a:lumMod val="15000"/>
+            <a:lumOff val="85000"/>
           </a:schemeClr>
         </a:solidFill>
       </a:ln>
     </cs:spPr>
-    <cs:defRPr sz="900" kern="1200"/>
+    <cs:defRPr sz="1197" kern="1200"/>
   </cs:dataTable>
   <cs:downBar>
     <cs:lnRef idx="0"/>
     <cs:fillRef idx="0"/>
     <cs:effectRef idx="0"/>
     <cs:fontRef idx="minor">
-      <a:schemeClr val="tx1"/>
+      <a:schemeClr val="dk1"/>
     </cs:fontRef>
     <cs:spPr>
       <a:solidFill>
@@ -6446,9 +6467,9 @@
       </a:solidFill>
       <a:ln w="9525">
         <a:solidFill>
-          <a:schemeClr val="lt1">
-            <a:lumMod val="95000"/>
-            <a:alpha val="54000"/>
+          <a:schemeClr val="tx1">
+            <a:lumMod val="65000"/>
+            <a:lumOff val="35000"/>
           </a:schemeClr>
         </a:solidFill>
       </a:ln>
@@ -6459,17 +6480,16 @@
     <cs:fillRef idx="0"/>
     <cs:effectRef idx="0"/>
     <cs:fontRef idx="minor">
-      <a:schemeClr val="tx1"/>
+      <a:schemeClr val="dk1"/>
     </cs:fontRef>
     <cs:spPr>
       <a:ln w="9525">
         <a:solidFill>
-          <a:schemeClr val="lt1">
-            <a:lumMod val="95000"/>
-            <a:alpha val="54000"/>
+          <a:schemeClr val="tx1">
+            <a:lumMod val="35000"/>
+            <a:lumOff val="65000"/>
           </a:schemeClr>
         </a:solidFill>
-        <a:prstDash val="dash"/>
       </a:ln>
     </cs:spPr>
   </cs:dropLine>
@@ -6478,13 +6498,14 @@
     <cs:fillRef idx="0"/>
     <cs:effectRef idx="0"/>
     <cs:fontRef idx="minor">
-      <a:schemeClr val="tx1"/>
+      <a:schemeClr val="dk1"/>
     </cs:fontRef>
     <cs:spPr>
       <a:ln w="9525" cap="flat" cmpd="sng" algn="ctr">
         <a:solidFill>
-          <a:schemeClr val="lt1">
-            <a:lumMod val="95000"/>
+          <a:schemeClr val="tx1">
+            <a:lumMod val="65000"/>
+            <a:lumOff val="35000"/>
           </a:schemeClr>
         </a:solidFill>
         <a:round/>
@@ -6496,7 +6517,7 @@
     <cs:fillRef idx="0"/>
     <cs:effectRef idx="0"/>
     <cs:fontRef idx="minor">
-      <a:schemeClr val="tx1"/>
+      <a:schemeClr val="dk1"/>
     </cs:fontRef>
   </cs:floor>
   <cs:gridlineMajor>
@@ -6509,9 +6530,9 @@
     <cs:spPr>
       <a:ln w="9525" cap="flat" cmpd="sng" algn="ctr">
         <a:solidFill>
-          <a:schemeClr val="dk1">
-            <a:lumMod val="50000"/>
-            <a:lumOff val="50000"/>
+          <a:schemeClr val="tx1">
+            <a:lumMod val="5000"/>
+            <a:lumOff val="95000"/>
           </a:schemeClr>
         </a:solidFill>
         <a:round/>
@@ -6526,13 +6547,14 @@
       <a:schemeClr val="tx1"/>
     </cs:fontRef>
     <cs:spPr>
-      <a:ln>
+      <a:ln w="9525" cap="flat" cmpd="sng" algn="ctr">
         <a:solidFill>
-          <a:schemeClr val="dk1">
-            <a:lumMod val="60000"/>
-            <a:lumOff val="40000"/>
+          <a:schemeClr val="tx1">
+            <a:lumMod val="5000"/>
+            <a:lumOff val="95000"/>
           </a:schemeClr>
         </a:solidFill>
+        <a:round/>
       </a:ln>
     </cs:spPr>
   </cs:gridlineMinor>
@@ -6541,17 +6563,16 @@
     <cs:fillRef idx="0"/>
     <cs:effectRef idx="0"/>
     <cs:fontRef idx="minor">
-      <a:schemeClr val="tx1"/>
+      <a:schemeClr val="dk1"/>
     </cs:fontRef>
     <cs:spPr>
       <a:ln w="9525">
         <a:solidFill>
-          <a:schemeClr val="lt1">
-            <a:lumMod val="95000"/>
-            <a:alpha val="54000"/>
+          <a:schemeClr val="tx1">
+            <a:lumMod val="50000"/>
+            <a:lumOff val="50000"/>
           </a:schemeClr>
         </a:solidFill>
-        <a:prstDash val="dash"/>
       </a:ln>
     </cs:spPr>
   </cs:hiLoLine>
@@ -6560,14 +6581,14 @@
     <cs:fillRef idx="0"/>
     <cs:effectRef idx="0"/>
     <cs:fontRef idx="minor">
-      <a:schemeClr val="tx1"/>
+      <a:schemeClr val="dk1"/>
     </cs:fontRef>
     <cs:spPr>
       <a:ln w="9525">
         <a:solidFill>
-          <a:schemeClr val="lt1">
-            <a:lumMod val="95000"/>
-            <a:alpha val="54000"/>
+          <a:schemeClr val="tx1">
+            <a:lumMod val="35000"/>
+            <a:lumOff val="65000"/>
           </a:schemeClr>
         </a:solidFill>
       </a:ln>
@@ -6578,26 +6599,27 @@
     <cs:fillRef idx="0"/>
     <cs:effectRef idx="0"/>
     <cs:fontRef idx="minor">
-      <a:schemeClr val="lt1">
-        <a:lumMod val="85000"/>
+      <a:schemeClr val="tx1">
+        <a:lumMod val="65000"/>
+        <a:lumOff val="35000"/>
       </a:schemeClr>
     </cs:fontRef>
-    <cs:defRPr sz="900" kern="1200"/>
+    <cs:defRPr sz="1197" kern="1200"/>
   </cs:legend>
-  <cs:plotArea>
+  <cs:plotArea mods="allowNoFillOverride allowNoLineOverride">
     <cs:lnRef idx="0"/>
     <cs:fillRef idx="0"/>
     <cs:effectRef idx="0"/>
     <cs:fontRef idx="minor">
-      <a:schemeClr val="tx1"/>
+      <a:schemeClr val="dk1"/>
     </cs:fontRef>
   </cs:plotArea>
-  <cs:plotArea3D>
+  <cs:plotArea3D mods="allowNoFillOverride allowNoLineOverride">
     <cs:lnRef idx="0"/>
     <cs:fillRef idx="0"/>
     <cs:effectRef idx="0"/>
     <cs:fontRef idx="minor">
-      <a:schemeClr val="tx1"/>
+      <a:schemeClr val="dk1"/>
     </cs:fontRef>
   </cs:plotArea3D>
   <cs:seriesAxis>
@@ -6605,26 +6627,39 @@
     <cs:fillRef idx="0"/>
     <cs:effectRef idx="0"/>
     <cs:fontRef idx="minor">
-      <a:schemeClr val="lt1">
-        <a:lumMod val="85000"/>
+      <a:schemeClr val="tx1">
+        <a:lumMod val="65000"/>
+        <a:lumOff val="35000"/>
       </a:schemeClr>
     </cs:fontRef>
-    <cs:spPr/>
-    <cs:defRPr sz="900" kern="1200"/>
+    <cs:spPr>
+      <a:ln w="9525" cap="flat" cmpd="sng" algn="ctr">
+        <a:solidFill>
+          <a:schemeClr val="tx1">
+            <a:lumMod val="15000"/>
+            <a:lumOff val="85000"/>
+          </a:schemeClr>
+        </a:solidFill>
+        <a:round/>
+        <a:headEnd type="none" w="sm" len="sm"/>
+        <a:tailEnd type="none" w="sm" len="sm"/>
+      </a:ln>
+    </cs:spPr>
+    <cs:defRPr sz="1197" kern="1200"/>
   </cs:seriesAxis>
   <cs:seriesLine>
     <cs:lnRef idx="0"/>
     <cs:fillRef idx="0"/>
     <cs:effectRef idx="0"/>
     <cs:fontRef idx="minor">
-      <a:schemeClr val="lt1"/>
+      <a:schemeClr val="dk1"/>
     </cs:fontRef>
     <cs:spPr>
-      <a:ln w="9525" cap="flat" cmpd="sng" algn="ctr">
+      <a:ln w="9525">
         <a:solidFill>
-          <a:schemeClr val="lt1">
-            <a:lumMod val="95000"/>
-            <a:alpha val="54000"/>
+          <a:schemeClr val="tx1">
+            <a:lumMod val="35000"/>
+            <a:lumOff val="65000"/>
           </a:schemeClr>
         </a:solidFill>
         <a:round/>
@@ -6636,19 +6671,12 @@
     <cs:fillRef idx="0"/>
     <cs:effectRef idx="0"/>
     <cs:fontRef idx="minor">
-      <a:schemeClr val="lt1">
-        <a:lumMod val="95000"/>
+      <a:schemeClr val="tx1">
+        <a:lumMod val="65000"/>
+        <a:lumOff val="35000"/>
       </a:schemeClr>
     </cs:fontRef>
-    <cs:defRPr sz="1600" b="1" kern="1200" spc="100" baseline="0">
-      <a:effectLst>
-        <a:outerShdw blurRad="50800" dist="38100" dir="5400000" algn="t" rotWithShape="0">
-          <a:prstClr val="black">
-            <a:alpha val="40000"/>
-          </a:prstClr>
-        </a:outerShdw>
-      </a:effectLst>
-    </cs:defRPr>
+    <cs:defRPr sz="2200" b="1" kern="1200" cap="all" spc="50" baseline="0"/>
   </cs:title>
   <cs:trendline>
     <cs:lnRef idx="0">
@@ -6657,10 +6685,10 @@
     <cs:fillRef idx="0"/>
     <cs:effectRef idx="0"/>
     <cs:fontRef idx="minor">
-      <a:schemeClr val="tx1"/>
+      <a:schemeClr val="dk1"/>
     </cs:fontRef>
     <cs:spPr>
-      <a:ln w="19050" cap="rnd">
+      <a:ln w="9525" cap="rnd">
         <a:solidFill>
           <a:schemeClr val="phClr"/>
         </a:solidFill>
@@ -6672,18 +6700,19 @@
     <cs:fillRef idx="0"/>
     <cs:effectRef idx="0"/>
     <cs:fontRef idx="minor">
-      <a:schemeClr val="lt1">
-        <a:lumMod val="85000"/>
+      <a:schemeClr val="tx1">
+        <a:lumMod val="65000"/>
+        <a:lumOff val="35000"/>
       </a:schemeClr>
     </cs:fontRef>
-    <cs:defRPr sz="900" kern="1200"/>
+    <cs:defRPr sz="1197" kern="1200"/>
   </cs:trendlineLabel>
   <cs:upBar>
     <cs:lnRef idx="0"/>
     <cs:fillRef idx="0"/>
     <cs:effectRef idx="0"/>
     <cs:fontRef idx="minor">
-      <a:schemeClr val="tx1"/>
+      <a:schemeClr val="dk1"/>
     </cs:fontRef>
     <cs:spPr>
       <a:solidFill>
@@ -6691,9 +6720,9 @@
       </a:solidFill>
       <a:ln w="9525">
         <a:solidFill>
-          <a:schemeClr val="lt1">
-            <a:lumMod val="95000"/>
-            <a:alpha val="54000"/>
+          <a:schemeClr val="tx1">
+            <a:lumMod val="65000"/>
+            <a:lumOff val="35000"/>
           </a:schemeClr>
         </a:solidFill>
       </a:ln>
@@ -6704,18 +6733,19 @@
     <cs:fillRef idx="0"/>
     <cs:effectRef idx="0"/>
     <cs:fontRef idx="minor">
-      <a:schemeClr val="lt1">
-        <a:lumMod val="85000"/>
+      <a:schemeClr val="tx1">
+        <a:lumMod val="65000"/>
+        <a:lumOff val="35000"/>
       </a:schemeClr>
     </cs:fontRef>
-    <cs:defRPr sz="900" kern="1200"/>
+    <cs:defRPr sz="1197" kern="1200"/>
   </cs:valueAxis>
   <cs:wall>
     <cs:lnRef idx="0"/>
     <cs:fillRef idx="0"/>
     <cs:effectRef idx="0"/>
     <cs:fontRef idx="minor">
-      <a:schemeClr val="tx1"/>
+      <a:schemeClr val="dk1"/>
     </cs:fontRef>
   </cs:wall>
 </cs:chartStyle>
@@ -7727,72 +7757,33 @@
 </file>
 
 <file path=ppt/charts/style6.xml><?xml version="1.0" encoding="utf-8"?>
-<cs:chartStyle xmlns:cs="http://schemas.microsoft.com/office/drawing/2012/chartStyle" xmlns:a="http://schemas.openxmlformats.org/drawingml/2006/main" id="205">
+<cs:chartStyle xmlns:cs="http://schemas.microsoft.com/office/drawing/2012/chartStyle" xmlns:a="http://schemas.openxmlformats.org/drawingml/2006/main" id="215">
   <cs:axisTitle>
     <cs:lnRef idx="0"/>
     <cs:fillRef idx="0"/>
     <cs:effectRef idx="0"/>
     <cs:fontRef idx="minor">
-      <a:schemeClr val="dk1">
-        <a:lumMod val="75000"/>
-        <a:lumOff val="25000"/>
+      <a:schemeClr val="tx1">
+        <a:lumMod val="65000"/>
+        <a:lumOff val="35000"/>
       </a:schemeClr>
     </cs:fontRef>
-    <cs:defRPr sz="900" b="1" kern="1200"/>
+    <cs:defRPr sz="1197" kern="1200" cap="all"/>
   </cs:axisTitle>
   <cs:categoryAxis>
     <cs:lnRef idx="0"/>
     <cs:fillRef idx="0"/>
     <cs:effectRef idx="0"/>
     <cs:fontRef idx="minor">
-      <a:schemeClr val="dk1">
-        <a:lumMod val="75000"/>
-        <a:lumOff val="25000"/>
+      <a:schemeClr val="tx1">
+        <a:lumMod val="65000"/>
+        <a:lumOff val="35000"/>
       </a:schemeClr>
     </cs:fontRef>
     <cs:spPr>
-      <a:ln w="19050" cap="flat" cmpd="sng" algn="ctr">
+      <a:ln w="15875" cap="flat" cmpd="sng" algn="ctr">
         <a:solidFill>
-          <a:schemeClr val="dk1">
-            <a:lumMod val="75000"/>
-            <a:lumOff val="25000"/>
-          </a:schemeClr>
-        </a:solidFill>
-        <a:round/>
-      </a:ln>
-    </cs:spPr>
-    <cs:defRPr sz="900" kern="1200" cap="all" baseline="0"/>
-  </cs:categoryAxis>
-  <cs:chartArea>
-    <cs:lnRef idx="0"/>
-    <cs:fillRef idx="0"/>
-    <cs:effectRef idx="0"/>
-    <cs:fontRef idx="minor">
-      <a:schemeClr val="dk1"/>
-    </cs:fontRef>
-    <cs:spPr>
-      <a:gradFill flip="none" rotWithShape="1">
-        <a:gsLst>
-          <a:gs pos="0">
-            <a:schemeClr val="lt1"/>
-          </a:gs>
-          <a:gs pos="39000">
-            <a:schemeClr val="lt1"/>
-          </a:gs>
-          <a:gs pos="100000">
-            <a:schemeClr val="lt1">
-              <a:lumMod val="75000"/>
-            </a:schemeClr>
-          </a:gs>
-        </a:gsLst>
-        <a:path path="circle">
-          <a:fillToRect l="50000" t="-80000" r="50000" b="180000"/>
-        </a:path>
-        <a:tileRect/>
-      </a:gradFill>
-      <a:ln w="9525" cap="flat" cmpd="sng" algn="ctr">
-        <a:solidFill>
-          <a:schemeClr val="dk1">
+          <a:schemeClr val="tx1">
             <a:lumMod val="25000"/>
             <a:lumOff val="75000"/>
           </a:schemeClr>
@@ -7800,34 +7791,59 @@
         <a:round/>
       </a:ln>
     </cs:spPr>
-    <cs:defRPr sz="900" kern="1200"/>
+    <cs:defRPr sz="1197" kern="1200" cap="none" spc="20" normalizeH="0" baseline="0"/>
+  </cs:categoryAxis>
+  <cs:chartArea mods="allowNoFillOverride allowNoLineOverride">
+    <cs:lnRef idx="0"/>
+    <cs:fillRef idx="0"/>
+    <cs:effectRef idx="0"/>
+    <cs:fontRef idx="minor">
+      <a:schemeClr val="dk1"/>
+    </cs:fontRef>
+    <cs:spPr>
+      <a:solidFill>
+        <a:schemeClr val="lt1"/>
+      </a:solidFill>
+      <a:ln w="9525" cap="flat" cmpd="sng" algn="ctr">
+        <a:solidFill>
+          <a:schemeClr val="tx1">
+            <a:lumMod val="15000"/>
+            <a:lumOff val="85000"/>
+          </a:schemeClr>
+        </a:solidFill>
+        <a:round/>
+      </a:ln>
+    </cs:spPr>
+    <cs:defRPr sz="1197" kern="1200"/>
   </cs:chartArea>
   <cs:dataLabel>
     <cs:lnRef idx="0"/>
     <cs:fillRef idx="0"/>
     <cs:effectRef idx="0"/>
     <cs:fontRef idx="minor">
-      <a:schemeClr val="lt1"/>
-    </cs:fontRef>
-    <cs:defRPr sz="900" b="1" i="0" u="none" strike="noStrike" kern="1200" baseline="0"/>
+      <a:schemeClr val="tx1">
+        <a:lumMod val="75000"/>
+        <a:lumOff val="25000"/>
+      </a:schemeClr>
+    </cs:fontRef>
+    <cs:defRPr sz="1197" kern="1200"/>
   </cs:dataLabel>
   <cs:dataLabelCallout>
     <cs:lnRef idx="0"/>
     <cs:fillRef idx="0"/>
     <cs:effectRef idx="0"/>
     <cs:fontRef idx="minor">
-      <a:schemeClr val="lt1"/>
+      <a:schemeClr val="bg1"/>
     </cs:fontRef>
     <cs:spPr>
       <a:solidFill>
-        <a:schemeClr val="dk1">
-          <a:lumMod val="65000"/>
-          <a:lumOff val="35000"/>
-          <a:alpha val="75000"/>
+        <a:schemeClr val="tx1">
+          <a:lumMod val="50000"/>
+          <a:lumOff val="50000"/>
         </a:schemeClr>
       </a:solidFill>
     </cs:spPr>
-    <cs:defRPr sz="900" b="1" kern="1200"/>
+    <cs:defRPr sz="1197" kern="1200"/>
     <cs:bodyPr rot="0" spcFirstLastPara="1" vertOverflow="clip" horzOverflow="clip" vert="horz" wrap="square" lIns="36576" tIns="18288" rIns="36576" bIns="18288" anchor="ctr" anchorCtr="1">
       <a:spAutoFit/>
     </cs:bodyPr>
@@ -7844,17 +7860,9 @@
     <cs:spPr>
       <a:solidFill>
         <a:schemeClr val="phClr">
-          <a:alpha val="85000"/>
+          <a:alpha val="70000"/>
         </a:schemeClr>
       </a:solidFill>
-      <a:ln w="9525" cap="flat" cmpd="sng" algn="ctr">
-        <a:solidFill>
-          <a:schemeClr val="lt1">
-            <a:alpha val="50000"/>
-          </a:schemeClr>
-        </a:solidFill>
-        <a:round/>
-      </a:ln>
     </cs:spPr>
   </cs:dataPoint>
   <cs:dataPoint3D>
@@ -7869,17 +7877,9 @@
     <cs:spPr>
       <a:solidFill>
         <a:schemeClr val="phClr">
-          <a:alpha val="85000"/>
+          <a:alpha val="70000"/>
         </a:schemeClr>
       </a:solidFill>
-      <a:ln w="9525" cap="flat" cmpd="sng" algn="ctr">
-        <a:solidFill>
-          <a:schemeClr val="lt1">
-            <a:alpha val="50000"/>
-          </a:schemeClr>
-        </a:solidFill>
-        <a:round/>
-      </a:ln>
     </cs:spPr>
   </cs:dataPoint3D>
   <cs:dataPointLine>
@@ -7892,10 +7892,10 @@
       <a:schemeClr val="dk1"/>
     </cs:fontRef>
     <cs:spPr>
-      <a:ln w="31750" cap="rnd">
+      <a:ln w="28575" cap="rnd">
         <a:solidFill>
           <a:schemeClr val="phClr">
-            <a:alpha val="85000"/>
+            <a:alpha val="70000"/>
           </a:schemeClr>
         </a:solidFill>
         <a:round/>
@@ -7914,7 +7914,7 @@
     <cs:spPr>
       <a:solidFill>
         <a:schemeClr val="phClr">
-          <a:alpha val="85000"/>
+          <a:alpha val="70000"/>
         </a:schemeClr>
       </a:solidFill>
     </cs:spPr>
@@ -7943,22 +7943,22 @@
     <cs:fillRef idx="0"/>
     <cs:effectRef idx="0"/>
     <cs:fontRef idx="minor">
-      <a:schemeClr val="dk1">
-        <a:lumMod val="75000"/>
-        <a:lumOff val="25000"/>
+      <a:schemeClr val="tx1">
+        <a:lumMod val="65000"/>
+        <a:lumOff val="35000"/>
       </a:schemeClr>
     </cs:fontRef>
     <cs:spPr>
       <a:ln w="9525">
         <a:solidFill>
-          <a:schemeClr val="dk1">
-            <a:lumMod val="35000"/>
-            <a:lumOff val="65000"/>
+          <a:schemeClr val="tx1">
+            <a:lumMod val="15000"/>
+            <a:lumOff val="85000"/>
           </a:schemeClr>
         </a:solidFill>
       </a:ln>
     </cs:spPr>
-    <cs:defRPr sz="900" kern="1200"/>
+    <cs:defRPr sz="1197" kern="1200"/>
   </cs:dataTable>
   <cs:downBar>
     <cs:lnRef idx="0"/>
@@ -7970,13 +7970,13 @@
     <cs:spPr>
       <a:solidFill>
         <a:schemeClr val="dk1">
-          <a:lumMod val="50000"/>
-          <a:lumOff val="50000"/>
+          <a:lumMod val="75000"/>
+          <a:lumOff val="25000"/>
         </a:schemeClr>
       </a:solidFill>
       <a:ln w="9525">
         <a:solidFill>
-          <a:schemeClr val="dk1">
+          <a:schemeClr val="tx1">
             <a:lumMod val="65000"/>
             <a:lumOff val="35000"/>
           </a:schemeClr>
@@ -7994,12 +7994,12 @@
     <cs:spPr>
       <a:ln w="9525">
         <a:solidFill>
-          <a:schemeClr val="dk1">
+          <a:schemeClr val="tx1">
             <a:lumMod val="35000"/>
             <a:lumOff val="65000"/>
           </a:schemeClr>
         </a:solidFill>
-        <a:prstDash val="dash"/>
+        <a:round/>
       </a:ln>
     </cs:spPr>
   </cs:dropLine>
@@ -8013,7 +8013,7 @@
     <cs:spPr>
       <a:ln w="9525">
         <a:solidFill>
-          <a:schemeClr val="dk1">
+          <a:schemeClr val="tx1">
             <a:lumMod val="65000"/>
             <a:lumOff val="35000"/>
           </a:schemeClr>
@@ -8039,24 +8039,12 @@
     </cs:fontRef>
     <cs:spPr>
       <a:ln w="9525" cap="flat" cmpd="sng" algn="ctr">
-        <a:gradFill>
-          <a:gsLst>
-            <a:gs pos="100000">
-              <a:schemeClr val="dk1">
-                <a:lumMod val="95000"/>
-                <a:lumOff val="5000"/>
-                <a:alpha val="42000"/>
-              </a:schemeClr>
-            </a:gs>
-            <a:gs pos="0">
-              <a:schemeClr val="lt1">
-                <a:lumMod val="75000"/>
-                <a:alpha val="36000"/>
-              </a:schemeClr>
-            </a:gs>
-          </a:gsLst>
-          <a:lin ang="5400000" scaled="0"/>
-        </a:gradFill>
+        <a:solidFill>
+          <a:schemeClr val="tx1">
+            <a:lumMod val="5000"/>
+            <a:lumOff val="95000"/>
+          </a:schemeClr>
+        </a:solidFill>
         <a:round/>
       </a:ln>
     </cs:spPr>
@@ -8070,24 +8058,12 @@
     </cs:fontRef>
     <cs:spPr>
       <a:ln>
-        <a:gradFill>
-          <a:gsLst>
-            <a:gs pos="100000">
-              <a:schemeClr val="dk1">
-                <a:lumMod val="95000"/>
-                <a:lumOff val="5000"/>
-                <a:alpha val="42000"/>
-              </a:schemeClr>
-            </a:gs>
-            <a:gs pos="0">
-              <a:schemeClr val="lt1">
-                <a:lumMod val="75000"/>
-                <a:alpha val="36000"/>
-              </a:schemeClr>
-            </a:gs>
-          </a:gsLst>
-          <a:lin ang="5400000" scaled="0"/>
-        </a:gradFill>
+        <a:solidFill>
+          <a:schemeClr val="tx1">
+            <a:lumMod val="5000"/>
+            <a:lumOff val="95000"/>
+          </a:schemeClr>
+        </a:solidFill>
       </a:ln>
     </cs:spPr>
   </cs:gridlineMinor>
@@ -8101,12 +8077,12 @@
     <cs:spPr>
       <a:ln w="9525">
         <a:solidFill>
-          <a:schemeClr val="dk1">
+          <a:schemeClr val="tx1">
             <a:lumMod val="35000"/>
             <a:lumOff val="65000"/>
           </a:schemeClr>
         </a:solidFill>
-        <a:prstDash val="dash"/>
+        <a:round/>
       </a:ln>
     </cs:spPr>
   </cs:hiLoLine>
@@ -8120,9 +8096,9 @@
     <cs:spPr>
       <a:ln w="9525">
         <a:solidFill>
-          <a:schemeClr val="dk1">
-            <a:lumMod val="50000"/>
-            <a:lumOff val="50000"/>
+          <a:schemeClr val="tx1">
+            <a:lumMod val="35000"/>
+            <a:lumOff val="65000"/>
           </a:schemeClr>
         </a:solidFill>
       </a:ln>
@@ -8133,22 +8109,14 @@
     <cs:fillRef idx="0"/>
     <cs:effectRef idx="0"/>
     <cs:fontRef idx="minor">
-      <a:schemeClr val="dk1">
-        <a:lumMod val="75000"/>
-        <a:lumOff val="25000"/>
+      <a:schemeClr val="tx1">
+        <a:lumMod val="65000"/>
+        <a:lumOff val="35000"/>
       </a:schemeClr>
     </cs:fontRef>
-    <cs:spPr>
-      <a:solidFill>
-        <a:schemeClr val="lt1">
-          <a:lumMod val="95000"/>
-          <a:alpha val="39000"/>
-        </a:schemeClr>
-      </a:solidFill>
-    </cs:spPr>
-    <cs:defRPr sz="900" kern="1200"/>
+    <cs:defRPr sz="1197" kern="1200" baseline="0"/>
   </cs:legend>
-  <cs:plotArea>
+  <cs:plotArea mods="allowNoFillOverride allowNoLineOverride">
     <cs:lnRef idx="0"/>
     <cs:fillRef idx="0"/>
     <cs:effectRef idx="0"/>
@@ -8156,7 +8124,7 @@
       <a:schemeClr val="dk1"/>
     </cs:fontRef>
   </cs:plotArea>
-  <cs:plotArea3D>
+  <cs:plotArea3D mods="allowNoFillOverride allowNoLineOverride">
     <cs:lnRef idx="0"/>
     <cs:fillRef idx="0"/>
     <cs:effectRef idx="0"/>
@@ -8169,23 +8137,12 @@
     <cs:fillRef idx="0"/>
     <cs:effectRef idx="0"/>
     <cs:fontRef idx="minor">
-      <a:schemeClr val="dk1">
-        <a:lumMod val="75000"/>
-        <a:lumOff val="25000"/>
+      <a:schemeClr val="tx1">
+        <a:lumMod val="65000"/>
+        <a:lumOff val="35000"/>
       </a:schemeClr>
     </cs:fontRef>
-    <cs:spPr>
-      <a:ln w="31750" cap="flat" cmpd="sng" algn="ctr">
-        <a:solidFill>
-          <a:schemeClr val="dk1">
-            <a:lumMod val="75000"/>
-            <a:lumOff val="25000"/>
-          </a:schemeClr>
-        </a:solidFill>
-        <a:round/>
-      </a:ln>
-    </cs:spPr>
-    <cs:defRPr sz="900" kern="1200"/>
+    <cs:defRPr sz="1197" kern="1200"/>
   </cs:seriesAxis>
   <cs:seriesLine>
     <cs:lnRef idx="0"/>
@@ -8197,9 +8154,9 @@
     <cs:spPr>
       <a:ln w="9525">
         <a:solidFill>
-          <a:schemeClr val="dk1">
-            <a:lumMod val="50000"/>
-            <a:lumOff val="50000"/>
+          <a:schemeClr val="tx1">
+            <a:lumMod val="35000"/>
+            <a:lumOff val="65000"/>
           </a:schemeClr>
         </a:solidFill>
         <a:round/>
@@ -8210,13 +8167,13 @@
     <cs:lnRef idx="0"/>
     <cs:fillRef idx="0"/>
     <cs:effectRef idx="0"/>
-    <cs:fontRef idx="minor">
-      <a:schemeClr val="dk1">
-        <a:lumMod val="75000"/>
-        <a:lumOff val="25000"/>
+    <cs:fontRef idx="major">
+      <a:schemeClr val="tx1">
+        <a:lumMod val="65000"/>
+        <a:lumOff val="35000"/>
       </a:schemeClr>
     </cs:fontRef>
-    <cs:defRPr sz="1800" b="1" kern="1200" baseline="0"/>
+    <cs:defRPr sz="2128" b="0" i="0" kern="1200" cap="none" spc="50" normalizeH="0" baseline="0"/>
   </cs:title>
   <cs:trendline>
     <cs:lnRef idx="0">
@@ -8228,7 +8185,7 @@
       <a:schemeClr val="dk1"/>
     </cs:fontRef>
     <cs:spPr>
-      <a:ln w="19050" cap="rnd">
+      <a:ln w="15875" cap="rnd">
         <a:solidFill>
           <a:schemeClr val="phClr"/>
         </a:solidFill>
@@ -8240,12 +8197,12 @@
     <cs:fillRef idx="0"/>
     <cs:effectRef idx="0"/>
     <cs:fontRef idx="minor">
-      <a:schemeClr val="dk1">
-        <a:lumMod val="75000"/>
-        <a:lumOff val="25000"/>
+      <a:schemeClr val="tx1">
+        <a:lumMod val="65000"/>
+        <a:lumOff val="35000"/>
       </a:schemeClr>
     </cs:fontRef>
-    <cs:defRPr sz="900" kern="1200"/>
+    <cs:defRPr sz="1197" kern="1200"/>
   </cs:trendlineLabel>
   <cs:upBar>
     <cs:lnRef idx="0"/>
@@ -8260,7 +8217,7 @@
       </a:solidFill>
       <a:ln w="9525">
         <a:solidFill>
-          <a:schemeClr val="dk1">
+          <a:schemeClr val="tx1">
             <a:lumMod val="65000"/>
             <a:lumOff val="35000"/>
           </a:schemeClr>
@@ -8273,17 +8230,12 @@
     <cs:fillRef idx="0"/>
     <cs:effectRef idx="0"/>
     <cs:fontRef idx="minor">
-      <a:schemeClr val="dk1">
-        <a:lumMod val="75000"/>
-        <a:lumOff val="25000"/>
+      <a:schemeClr val="tx1">
+        <a:lumMod val="65000"/>
+        <a:lumOff val="35000"/>
       </a:schemeClr>
     </cs:fontRef>
-    <cs:spPr>
-      <a:ln>
-        <a:noFill/>
-      </a:ln>
-    </cs:spPr>
-    <cs:defRPr sz="900" kern="1200"/>
+    <cs:defRPr sz="1197" kern="1200" spc="20" baseline="0"/>
   </cs:valueAxis>
   <cs:wall>
     <cs:lnRef idx="0"/>
@@ -8445,7 +8397,7 @@
           <a:p>
             <a:fld id="{D9F7B49D-DC47-47BB-81A8-0DFF9BC591C6}" type="datetimeFigureOut">
               <a:rPr lang="en-IN" smtClean="0"/>
-              <a:t>28-10-2025</a:t>
+              <a:t>10-11-2025</a:t>
             </a:fld>
             <a:endParaRPr lang="en-IN"/>
           </a:p>
@@ -8645,7 +8597,7 @@
           <a:p>
             <a:fld id="{D9F7B49D-DC47-47BB-81A8-0DFF9BC591C6}" type="datetimeFigureOut">
               <a:rPr lang="en-IN" smtClean="0"/>
-              <a:t>28-10-2025</a:t>
+              <a:t>10-11-2025</a:t>
             </a:fld>
             <a:endParaRPr lang="en-IN"/>
           </a:p>
@@ -8855,7 +8807,7 @@
           <a:p>
             <a:fld id="{D9F7B49D-DC47-47BB-81A8-0DFF9BC591C6}" type="datetimeFigureOut">
               <a:rPr lang="en-IN" smtClean="0"/>
-              <a:t>28-10-2025</a:t>
+              <a:t>10-11-2025</a:t>
             </a:fld>
             <a:endParaRPr lang="en-IN"/>
           </a:p>
@@ -9055,7 +9007,7 @@
           <a:p>
             <a:fld id="{D9F7B49D-DC47-47BB-81A8-0DFF9BC591C6}" type="datetimeFigureOut">
               <a:rPr lang="en-IN" smtClean="0"/>
-              <a:t>28-10-2025</a:t>
+              <a:t>10-11-2025</a:t>
             </a:fld>
             <a:endParaRPr lang="en-IN"/>
           </a:p>
@@ -9331,7 +9283,7 @@
           <a:p>
             <a:fld id="{D9F7B49D-DC47-47BB-81A8-0DFF9BC591C6}" type="datetimeFigureOut">
               <a:rPr lang="en-IN" smtClean="0"/>
-              <a:t>28-10-2025</a:t>
+              <a:t>10-11-2025</a:t>
             </a:fld>
             <a:endParaRPr lang="en-IN"/>
           </a:p>
@@ -9599,7 +9551,7 @@
           <a:p>
             <a:fld id="{D9F7B49D-DC47-47BB-81A8-0DFF9BC591C6}" type="datetimeFigureOut">
               <a:rPr lang="en-IN" smtClean="0"/>
-              <a:t>28-10-2025</a:t>
+              <a:t>10-11-2025</a:t>
             </a:fld>
             <a:endParaRPr lang="en-IN"/>
           </a:p>
@@ -10014,7 +9966,7 @@
           <a:p>
             <a:fld id="{D9F7B49D-DC47-47BB-81A8-0DFF9BC591C6}" type="datetimeFigureOut">
               <a:rPr lang="en-IN" smtClean="0"/>
-              <a:t>28-10-2025</a:t>
+              <a:t>10-11-2025</a:t>
             </a:fld>
             <a:endParaRPr lang="en-IN"/>
           </a:p>
@@ -10156,7 +10108,7 @@
           <a:p>
             <a:fld id="{D9F7B49D-DC47-47BB-81A8-0DFF9BC591C6}" type="datetimeFigureOut">
               <a:rPr lang="en-IN" smtClean="0"/>
-              <a:t>28-10-2025</a:t>
+              <a:t>10-11-2025</a:t>
             </a:fld>
             <a:endParaRPr lang="en-IN"/>
           </a:p>
@@ -10269,7 +10221,7 @@
           <a:p>
             <a:fld id="{D9F7B49D-DC47-47BB-81A8-0DFF9BC591C6}" type="datetimeFigureOut">
               <a:rPr lang="en-IN" smtClean="0"/>
-              <a:t>28-10-2025</a:t>
+              <a:t>10-11-2025</a:t>
             </a:fld>
             <a:endParaRPr lang="en-IN"/>
           </a:p>
@@ -10582,7 +10534,7 @@
           <a:p>
             <a:fld id="{D9F7B49D-DC47-47BB-81A8-0DFF9BC591C6}" type="datetimeFigureOut">
               <a:rPr lang="en-IN" smtClean="0"/>
-              <a:t>28-10-2025</a:t>
+              <a:t>10-11-2025</a:t>
             </a:fld>
             <a:endParaRPr lang="en-IN"/>
           </a:p>
@@ -10871,7 +10823,7 @@
           <a:p>
             <a:fld id="{D9F7B49D-DC47-47BB-81A8-0DFF9BC591C6}" type="datetimeFigureOut">
               <a:rPr lang="en-IN" smtClean="0"/>
-              <a:t>28-10-2025</a:t>
+              <a:t>10-11-2025</a:t>
             </a:fld>
             <a:endParaRPr lang="en-IN"/>
           </a:p>
@@ -11114,7 +11066,7 @@
           <a:p>
             <a:fld id="{D9F7B49D-DC47-47BB-81A8-0DFF9BC591C6}" type="datetimeFigureOut">
               <a:rPr lang="en-IN" smtClean="0"/>
-              <a:t>28-10-2025</a:t>
+              <a:t>10-11-2025</a:t>
             </a:fld>
             <a:endParaRPr lang="en-IN"/>
           </a:p>
@@ -12340,7 +12292,7 @@
             <p:ph idx="1"/>
             <p:extLst>
               <p:ext uri="{D42A27DB-BD31-4B8C-83A1-F6EECF244321}">
-                <p14:modId xmlns:p14="http://schemas.microsoft.com/office/powerpoint/2010/main" val="484210771"/>
+                <p14:modId xmlns:p14="http://schemas.microsoft.com/office/powerpoint/2010/main" val="2857722527"/>
               </p:ext>
             </p:extLst>
           </p:nvPr>
@@ -12984,13 +12936,12 @@
                 <a:latin typeface="Times New Roman" panose="02020603050405020304" pitchFamily="18" charset="0"/>
                 <a:cs typeface="Times New Roman" panose="02020603050405020304" pitchFamily="18" charset="0"/>
               </a:rPr>
-              <a:t> or personalized outreach</a:t>
-            </a:r>
-            <a:r>
-              <a:rPr lang="en-US" dirty="0"/>
-              <a:t>.</a:t>
-            </a:r>
-            <a:endParaRPr lang="en-US" b="1" dirty="0"/>
+              <a:t> or personalized outreach.</a:t>
+            </a:r>
+            <a:endParaRPr lang="en-US" b="1" dirty="0">
+              <a:latin typeface="Times New Roman" panose="02020603050405020304" pitchFamily="18" charset="0"/>
+              <a:cs typeface="Times New Roman" panose="02020603050405020304" pitchFamily="18" charset="0"/>
+            </a:endParaRPr>
           </a:p>
         </p:txBody>
       </p:sp>
@@ -13198,17 +13149,9 @@
                 <a:cs typeface="Times New Roman"/>
                 <a:sym typeface="Lilita One"/>
               </a:rPr>
-              <a:t>Promotion through notification should be done via tests and mails</a:t>
-            </a:r>
-            <a:r>
-              <a:rPr lang="en-US" sz="2000" dirty="0">
-                <a:latin typeface="Times New Roman"/>
-                <a:cs typeface="Times New Roman"/>
-                <a:sym typeface="Lilita One"/>
-              </a:rPr>
-              <a:t>.</a:t>
-            </a:r>
-            <a:endParaRPr lang="en-US" sz="2000" dirty="0">
+              <a:t>Promotion through notification should be done via tests and mails.</a:t>
+            </a:r>
+            <a:endParaRPr lang="en-US" dirty="0">
               <a:latin typeface="Times New Roman"/>
               <a:cs typeface="Times New Roman"/>
               <a:sym typeface="Times New Roman"/>
@@ -13420,8 +13363,8 @@
         </p:nvSpPr>
         <p:spPr>
           <a:xfrm>
-            <a:off x="318053" y="2182742"/>
-            <a:ext cx="7992570" cy="3211061"/>
+            <a:off x="208722" y="2182742"/>
+            <a:ext cx="8543501" cy="3383171"/>
           </a:xfrm>
         </p:spPr>
         <p:txBody>
@@ -13433,82 +13376,79 @@
             <a:pPr marL="0" indent="0">
               <a:buNone/>
             </a:pPr>
-            <a:r>
-              <a:rPr lang="en-US" dirty="0">
-                <a:latin typeface="Times New Roman" panose="02020603050405020304" pitchFamily="18" charset="0"/>
-                <a:cs typeface="Times New Roman" panose="02020603050405020304" pitchFamily="18" charset="0"/>
-              </a:rPr>
-              <a:t>Meta, founded by Mark Zuckerberg in 2004 as Facebook, rebranded in 2021 to focus on building the </a:t>
-            </a:r>
-            <a:r>
-              <a:rPr lang="en-US" b="1" dirty="0">
-                <a:latin typeface="Times New Roman" panose="02020603050405020304" pitchFamily="18" charset="0"/>
-                <a:cs typeface="Times New Roman" panose="02020603050405020304" pitchFamily="18" charset="0"/>
-              </a:rPr>
+            <a:endParaRPr lang="en-US" b="1" dirty="0"/>
+          </a:p>
+          <a:p>
+            <a:pPr marL="0" indent="0">
+              <a:buNone/>
+            </a:pPr>
+            <a:r>
+              <a:rPr lang="en-US" b="1" dirty="0"/>
+              <a:t>Meta</a:t>
+            </a:r>
+            <a:r>
+              <a:rPr lang="en-US" dirty="0"/>
+              <a:t> – Founded by </a:t>
+            </a:r>
+            <a:r>
+              <a:rPr lang="en-US" b="1" dirty="0"/>
+              <a:t>Mark Zuckerberg</a:t>
+            </a:r>
+            <a:r>
+              <a:rPr lang="en-US" dirty="0"/>
+              <a:t> in </a:t>
+            </a:r>
+            <a:r>
+              <a:rPr lang="en-US" b="1" dirty="0"/>
+              <a:t>2004</a:t>
+            </a:r>
+            <a:r>
+              <a:rPr lang="en-US" dirty="0"/>
+              <a:t> as </a:t>
+            </a:r>
+            <a:r>
+              <a:rPr lang="en-US" b="1" dirty="0"/>
+              <a:t>Facebook</a:t>
+            </a:r>
+            <a:r>
+              <a:rPr lang="en-US" dirty="0"/>
+              <a:t>, rebranded in </a:t>
+            </a:r>
+            <a:r>
+              <a:rPr lang="en-US" b="1" dirty="0"/>
+              <a:t>2021</a:t>
+            </a:r>
+            <a:r>
+              <a:rPr lang="en-US" dirty="0"/>
+              <a:t> to focus on the </a:t>
+            </a:r>
+            <a:r>
+              <a:rPr lang="en-US" b="1" dirty="0"/>
               <a:t>Metaverse</a:t>
             </a:r>
             <a:r>
-              <a:rPr lang="en-US" dirty="0">
-                <a:latin typeface="Times New Roman" panose="02020603050405020304" pitchFamily="18" charset="0"/>
-                <a:cs typeface="Times New Roman" panose="02020603050405020304" pitchFamily="18" charset="0"/>
-              </a:rPr>
-              <a:t>  a virtual space for social interaction and collaboration. Its products include </a:t>
-            </a:r>
-            <a:r>
-              <a:rPr lang="en-US" b="1" dirty="0">
-                <a:latin typeface="Times New Roman" panose="02020603050405020304" pitchFamily="18" charset="0"/>
-                <a:cs typeface="Times New Roman" panose="02020603050405020304" pitchFamily="18" charset="0"/>
-              </a:rPr>
-              <a:t>Facebook</a:t>
-            </a:r>
-            <a:r>
-              <a:rPr lang="en-US" dirty="0">
-                <a:latin typeface="Times New Roman" panose="02020603050405020304" pitchFamily="18" charset="0"/>
-                <a:cs typeface="Times New Roman" panose="02020603050405020304" pitchFamily="18" charset="0"/>
-              </a:rPr>
-              <a:t>, </a:t>
-            </a:r>
-            <a:r>
-              <a:rPr lang="en-US" b="1" dirty="0">
-                <a:latin typeface="Times New Roman" panose="02020603050405020304" pitchFamily="18" charset="0"/>
-                <a:cs typeface="Times New Roman" panose="02020603050405020304" pitchFamily="18" charset="0"/>
-              </a:rPr>
-              <a:t>Instagram</a:t>
-            </a:r>
-            <a:r>
-              <a:rPr lang="en-US" dirty="0">
-                <a:latin typeface="Times New Roman" panose="02020603050405020304" pitchFamily="18" charset="0"/>
-                <a:cs typeface="Times New Roman" panose="02020603050405020304" pitchFamily="18" charset="0"/>
-              </a:rPr>
-              <a:t>, </a:t>
-            </a:r>
-            <a:r>
-              <a:rPr lang="en-US" b="1" dirty="0">
-                <a:latin typeface="Times New Roman" panose="02020603050405020304" pitchFamily="18" charset="0"/>
-                <a:cs typeface="Times New Roman" panose="02020603050405020304" pitchFamily="18" charset="0"/>
-              </a:rPr>
-              <a:t>WhatsApp</a:t>
-            </a:r>
-            <a:r>
-              <a:rPr lang="en-US" dirty="0">
-                <a:latin typeface="Times New Roman" panose="02020603050405020304" pitchFamily="18" charset="0"/>
-                <a:cs typeface="Times New Roman" panose="02020603050405020304" pitchFamily="18" charset="0"/>
-              </a:rPr>
-              <a:t>, and </a:t>
-            </a:r>
-            <a:r>
-              <a:rPr lang="en-US" b="1" dirty="0">
-                <a:latin typeface="Times New Roman" panose="02020603050405020304" pitchFamily="18" charset="0"/>
-                <a:cs typeface="Times New Roman" panose="02020603050405020304" pitchFamily="18" charset="0"/>
-              </a:rPr>
-              <a:t>Oculus</a:t>
-            </a:r>
-            <a:r>
-              <a:rPr lang="en-US" dirty="0">
-                <a:latin typeface="Times New Roman" panose="02020603050405020304" pitchFamily="18" charset="0"/>
-                <a:cs typeface="Times New Roman" panose="02020603050405020304" pitchFamily="18" charset="0"/>
-              </a:rPr>
-              <a:t>, aiming to blend virtual and physical worlds for more connected digital experiences.</a:t>
+              <a:rPr lang="en-US" dirty="0"/>
+              <a:t>, a virtual space for social interaction and collaboration.</a:t>
+            </a:r>
+          </a:p>
+          <a:p>
+            <a:pPr marL="0" indent="0">
+              <a:buNone/>
+            </a:pPr>
+            <a:br>
+              <a:rPr lang="en-US" dirty="0"/>
+            </a:br>
+            <a:r>
+              <a:rPr lang="en-US" dirty="0"/>
+              <a:t>Products: </a:t>
+            </a:r>
+            <a:r>
+              <a:rPr lang="en-US" b="1" dirty="0"/>
+              <a:t>Facebook, Instagram, WhatsApp, Oculus</a:t>
+            </a:r>
+            <a:r>
+              <a:rPr lang="en-US" dirty="0"/>
+              <a:t> – aiming to connect virtual and physical worlds.</a:t>
             </a:r>
             <a:endParaRPr lang="en-IN" dirty="0">
               <a:latin typeface="Times New Roman" panose="02020603050405020304" pitchFamily="18" charset="0"/>
@@ -13582,8 +13522,8 @@
         </p:blipFill>
         <p:spPr bwMode="auto">
           <a:xfrm>
-            <a:off x="8310623" y="2182742"/>
-            <a:ext cx="3778084" cy="2125172"/>
+            <a:off x="8752224" y="2484782"/>
+            <a:ext cx="3346422" cy="3180521"/>
           </a:xfrm>
           <a:prstGeom prst="rect">
             <a:avLst/>
@@ -13728,8 +13668,8 @@
         </p:nvSpPr>
         <p:spPr>
           <a:xfrm>
-            <a:off x="1303662" y="2766351"/>
-            <a:ext cx="10280374" cy="2442258"/>
+            <a:off x="367749" y="2355574"/>
+            <a:ext cx="11216288" cy="3995530"/>
           </a:xfrm>
         </p:spPr>
         <p:txBody>
@@ -13802,7 +13742,7 @@
         </p:nvSpPr>
         <p:spPr>
           <a:xfrm>
-            <a:off x="3339548" y="365125"/>
+            <a:off x="3909390" y="172623"/>
             <a:ext cx="4373217" cy="1225136"/>
           </a:xfrm>
         </p:spPr>
@@ -13851,13 +13791,13 @@
         </p:nvSpPr>
         <p:spPr>
           <a:xfrm>
-            <a:off x="775252" y="1828801"/>
-            <a:ext cx="6003235" cy="4263887"/>
+            <a:off x="659295" y="1590261"/>
+            <a:ext cx="10873409" cy="4482548"/>
           </a:xfrm>
         </p:spPr>
         <p:txBody>
           <a:bodyPr>
-            <a:normAutofit fontScale="70000" lnSpcReduction="20000"/>
+            <a:normAutofit fontScale="92500" lnSpcReduction="10000"/>
           </a:bodyPr>
           <a:lstStyle/>
           <a:p>
@@ -14113,356 +14053,6 @@
             <a:endParaRPr lang="en-IN" dirty="0">
               <a:latin typeface="Times New Roman"/>
               <a:cs typeface="Times New Roman"/>
-            </a:endParaRPr>
-          </a:p>
-        </p:txBody>
-      </p:sp>
-      <p:sp>
-        <p:nvSpPr>
-          <p:cNvPr id="7" name="TextBox 6">
-            <a:extLst>
-              <a:ext uri="{FF2B5EF4-FFF2-40B4-BE49-F238E27FC236}">
-                <a16:creationId xmlns:a16="http://schemas.microsoft.com/office/drawing/2014/main" id="{DB236B37-D7C4-5FE3-29F1-16850414D9E1}"/>
-              </a:ext>
-            </a:extLst>
-          </p:cNvPr>
-          <p:cNvSpPr txBox="1"/>
-          <p:nvPr/>
-        </p:nvSpPr>
-        <p:spPr>
-          <a:xfrm>
-            <a:off x="6609523" y="1720840"/>
-            <a:ext cx="5287618" cy="3416320"/>
-          </a:xfrm>
-          <a:prstGeom prst="rect">
-            <a:avLst/>
-          </a:prstGeom>
-          <a:noFill/>
-        </p:spPr>
-        <p:txBody>
-          <a:bodyPr wrap="square">
-            <a:spAutoFit/>
-          </a:bodyPr>
-          <a:lstStyle/>
-          <a:p>
-            <a:pPr marL="0" lvl="0" indent="0" algn="l" rtl="0">
-              <a:lnSpc>
-                <a:spcPct val="100000"/>
-              </a:lnSpc>
-              <a:spcBef>
-                <a:spcPts val="0"/>
-              </a:spcBef>
-              <a:spcAft>
-                <a:spcPts val="0"/>
-              </a:spcAft>
-              <a:buClr>
-                <a:schemeClr val="dk1"/>
-              </a:buClr>
-              <a:buFont typeface="Arial"/>
-              <a:buNone/>
-            </a:pPr>
-            <a:r>
-              <a:rPr lang="en-US" sz="1800" b="1" dirty="0">
-                <a:latin typeface="Calibri"/>
-                <a:ea typeface="Calibri"/>
-                <a:cs typeface="Calibri"/>
-                <a:sym typeface="Calibri"/>
-              </a:rPr>
-              <a:t>Users Table : </a:t>
-            </a:r>
-            <a:r>
-              <a:rPr lang="en-US" sz="1800" dirty="0">
-                <a:latin typeface="Calibri"/>
-                <a:ea typeface="Calibri"/>
-                <a:cs typeface="Calibri"/>
-                <a:sym typeface="Calibri"/>
-              </a:rPr>
-              <a:t>information about users registered on the platform</a:t>
-            </a:r>
-            <a:endParaRPr lang="en-US" sz="1200" dirty="0">
-              <a:latin typeface="Arial"/>
-              <a:ea typeface="Arial"/>
-              <a:cs typeface="Arial"/>
-              <a:sym typeface="Arial"/>
-            </a:endParaRPr>
-          </a:p>
-          <a:p>
-            <a:pPr marL="0" lvl="0" indent="0" algn="l" rtl="0">
-              <a:lnSpc>
-                <a:spcPct val="100000"/>
-              </a:lnSpc>
-              <a:spcBef>
-                <a:spcPts val="0"/>
-              </a:spcBef>
-              <a:spcAft>
-                <a:spcPts val="0"/>
-              </a:spcAft>
-              <a:buClr>
-                <a:schemeClr val="dk1"/>
-              </a:buClr>
-              <a:buFont typeface="Arial"/>
-              <a:buNone/>
-            </a:pPr>
-            <a:r>
-              <a:rPr lang="en-US" sz="1800" b="1" dirty="0">
-                <a:latin typeface="Calibri"/>
-                <a:ea typeface="Calibri"/>
-                <a:cs typeface="Calibri"/>
-                <a:sym typeface="Calibri"/>
-              </a:rPr>
-              <a:t>Photos Table: </a:t>
-            </a:r>
-            <a:r>
-              <a:rPr lang="en-US" sz="1800" dirty="0">
-                <a:latin typeface="Calibri"/>
-                <a:ea typeface="Calibri"/>
-                <a:cs typeface="Calibri"/>
-                <a:sym typeface="Calibri"/>
-              </a:rPr>
-              <a:t>information about the photos uploaded by users.</a:t>
-            </a:r>
-            <a:endParaRPr lang="en-US" sz="1200" dirty="0">
-              <a:latin typeface="Arial"/>
-              <a:ea typeface="Arial"/>
-              <a:cs typeface="Arial"/>
-              <a:sym typeface="Arial"/>
-            </a:endParaRPr>
-          </a:p>
-          <a:p>
-            <a:pPr marL="0" lvl="0" indent="0" algn="l" rtl="0">
-              <a:lnSpc>
-                <a:spcPct val="100000"/>
-              </a:lnSpc>
-              <a:spcBef>
-                <a:spcPts val="0"/>
-              </a:spcBef>
-              <a:spcAft>
-                <a:spcPts val="0"/>
-              </a:spcAft>
-              <a:buClr>
-                <a:schemeClr val="dk1"/>
-              </a:buClr>
-              <a:buFont typeface="Arial"/>
-              <a:buNone/>
-            </a:pPr>
-            <a:r>
-              <a:rPr lang="en-US" sz="1800" b="1" dirty="0">
-                <a:latin typeface="Calibri"/>
-                <a:ea typeface="Calibri"/>
-                <a:cs typeface="Calibri"/>
-                <a:sym typeface="Calibri"/>
-              </a:rPr>
-              <a:t>Comments Table: </a:t>
-            </a:r>
-            <a:r>
-              <a:rPr lang="en-US" sz="1800" dirty="0">
-                <a:latin typeface="Calibri"/>
-                <a:ea typeface="Calibri"/>
-                <a:cs typeface="Calibri"/>
-                <a:sym typeface="Calibri"/>
-              </a:rPr>
-              <a:t>Stores all comments made by users on photos.</a:t>
-            </a:r>
-            <a:endParaRPr lang="en-US" sz="1200" dirty="0">
-              <a:latin typeface="Arial"/>
-              <a:ea typeface="Arial"/>
-              <a:cs typeface="Arial"/>
-              <a:sym typeface="Arial"/>
-            </a:endParaRPr>
-          </a:p>
-          <a:p>
-            <a:pPr marL="0" lvl="0" indent="0" algn="l" rtl="0">
-              <a:lnSpc>
-                <a:spcPct val="100000"/>
-              </a:lnSpc>
-              <a:spcBef>
-                <a:spcPts val="0"/>
-              </a:spcBef>
-              <a:spcAft>
-                <a:spcPts val="0"/>
-              </a:spcAft>
-              <a:buClr>
-                <a:schemeClr val="dk1"/>
-              </a:buClr>
-              <a:buFont typeface="Arial"/>
-              <a:buNone/>
-            </a:pPr>
-            <a:r>
-              <a:rPr lang="en-US" sz="1800" b="1" dirty="0">
-                <a:latin typeface="Calibri"/>
-                <a:ea typeface="Calibri"/>
-                <a:cs typeface="Calibri"/>
-                <a:sym typeface="Calibri"/>
-              </a:rPr>
-              <a:t>Likes Table: </a:t>
-            </a:r>
-            <a:r>
-              <a:rPr lang="en-US" sz="1800" dirty="0">
-                <a:latin typeface="Calibri"/>
-                <a:ea typeface="Calibri"/>
-                <a:cs typeface="Calibri"/>
-                <a:sym typeface="Calibri"/>
-              </a:rPr>
-              <a:t>Tracks which users liked which photos.</a:t>
-            </a:r>
-            <a:endParaRPr lang="en-US" sz="1200" dirty="0">
-              <a:latin typeface="Arial"/>
-              <a:ea typeface="Arial"/>
-              <a:cs typeface="Arial"/>
-              <a:sym typeface="Arial"/>
-            </a:endParaRPr>
-          </a:p>
-          <a:p>
-            <a:pPr marL="0" lvl="0" indent="0" algn="l" rtl="0">
-              <a:lnSpc>
-                <a:spcPct val="100000"/>
-              </a:lnSpc>
-              <a:spcBef>
-                <a:spcPts val="0"/>
-              </a:spcBef>
-              <a:spcAft>
-                <a:spcPts val="0"/>
-              </a:spcAft>
-              <a:buClr>
-                <a:schemeClr val="dk1"/>
-              </a:buClr>
-              <a:buFont typeface="Arial"/>
-              <a:buNone/>
-            </a:pPr>
-            <a:r>
-              <a:rPr lang="en-US" sz="1800" b="1" dirty="0">
-                <a:latin typeface="Calibri"/>
-                <a:ea typeface="Calibri"/>
-                <a:cs typeface="Calibri"/>
-                <a:sym typeface="Calibri"/>
-              </a:rPr>
-              <a:t>Follows Table: </a:t>
-            </a:r>
-            <a:r>
-              <a:rPr lang="en-US" sz="1800" dirty="0">
-                <a:latin typeface="Calibri"/>
-                <a:ea typeface="Calibri"/>
-                <a:cs typeface="Calibri"/>
-                <a:sym typeface="Calibri"/>
-              </a:rPr>
-              <a:t>Tracks user relationships (followers and </a:t>
-            </a:r>
-            <a:r>
-              <a:rPr lang="en-US" sz="1800" dirty="0" err="1">
-                <a:latin typeface="Calibri"/>
-                <a:ea typeface="Calibri"/>
-                <a:cs typeface="Calibri"/>
-                <a:sym typeface="Calibri"/>
-              </a:rPr>
-              <a:t>followees</a:t>
-            </a:r>
-            <a:r>
-              <a:rPr lang="en-US" sz="1800" dirty="0">
-                <a:latin typeface="Calibri"/>
-                <a:ea typeface="Calibri"/>
-                <a:cs typeface="Calibri"/>
-                <a:sym typeface="Calibri"/>
-              </a:rPr>
-              <a:t>).</a:t>
-            </a:r>
-            <a:endParaRPr lang="en-US" sz="1200" dirty="0">
-              <a:latin typeface="Arial"/>
-              <a:ea typeface="Arial"/>
-              <a:cs typeface="Arial"/>
-              <a:sym typeface="Arial"/>
-            </a:endParaRPr>
-          </a:p>
-          <a:p>
-            <a:pPr marL="0" lvl="0" indent="0" algn="l" rtl="0">
-              <a:lnSpc>
-                <a:spcPct val="100000"/>
-              </a:lnSpc>
-              <a:spcBef>
-                <a:spcPts val="0"/>
-              </a:spcBef>
-              <a:spcAft>
-                <a:spcPts val="0"/>
-              </a:spcAft>
-              <a:buClr>
-                <a:schemeClr val="dk1"/>
-              </a:buClr>
-              <a:buFont typeface="Arial"/>
-              <a:buNone/>
-            </a:pPr>
-            <a:r>
-              <a:rPr lang="en-US" sz="1800" b="1" dirty="0">
-                <a:latin typeface="Calibri"/>
-                <a:ea typeface="Calibri"/>
-                <a:cs typeface="Calibri"/>
-                <a:sym typeface="Calibri"/>
-              </a:rPr>
-              <a:t>Tags Table: </a:t>
-            </a:r>
-            <a:r>
-              <a:rPr lang="en-US" sz="1800" dirty="0">
-                <a:latin typeface="Calibri"/>
-                <a:ea typeface="Calibri"/>
-                <a:cs typeface="Calibri"/>
-                <a:sym typeface="Calibri"/>
-              </a:rPr>
-              <a:t>Stores unique tags that are associated with photos.</a:t>
-            </a:r>
-            <a:endParaRPr lang="en-US" sz="1200" dirty="0">
-              <a:latin typeface="Arial"/>
-              <a:ea typeface="Arial"/>
-              <a:cs typeface="Arial"/>
-              <a:sym typeface="Arial"/>
-            </a:endParaRPr>
-          </a:p>
-          <a:p>
-            <a:pPr marL="0" lvl="0" indent="0" algn="l" rtl="0">
-              <a:lnSpc>
-                <a:spcPct val="100000"/>
-              </a:lnSpc>
-              <a:spcBef>
-                <a:spcPts val="0"/>
-              </a:spcBef>
-              <a:spcAft>
-                <a:spcPts val="0"/>
-              </a:spcAft>
-              <a:buClr>
-                <a:schemeClr val="dk1"/>
-              </a:buClr>
-              <a:buFont typeface="Arial"/>
-              <a:buNone/>
-            </a:pPr>
-            <a:r>
-              <a:rPr lang="en-US" sz="1800" b="1" dirty="0" err="1">
-                <a:latin typeface="Calibri"/>
-                <a:ea typeface="Calibri"/>
-                <a:cs typeface="Calibri"/>
-                <a:sym typeface="Calibri"/>
-              </a:rPr>
-              <a:t>Photo_Tags</a:t>
-            </a:r>
-            <a:r>
-              <a:rPr lang="en-US" sz="1800" b="1" dirty="0">
-                <a:latin typeface="Calibri"/>
-                <a:ea typeface="Calibri"/>
-                <a:cs typeface="Calibri"/>
-                <a:sym typeface="Calibri"/>
-              </a:rPr>
-              <a:t> Table: </a:t>
-            </a:r>
-            <a:r>
-              <a:rPr lang="en-US" sz="1800" dirty="0">
-                <a:latin typeface="Calibri"/>
-                <a:ea typeface="Calibri"/>
-                <a:cs typeface="Calibri"/>
-                <a:sym typeface="Calibri"/>
-              </a:rPr>
-              <a:t>connects photos with tags.</a:t>
-            </a:r>
-            <a:endParaRPr lang="en-US" sz="1200" dirty="0">
-              <a:latin typeface="Arial"/>
-              <a:ea typeface="Arial"/>
-              <a:cs typeface="Arial"/>
-              <a:sym typeface="Arial"/>
             </a:endParaRPr>
           </a:p>
         </p:txBody>
@@ -14513,7 +14103,12 @@
             <p:ph type="title"/>
           </p:nvPr>
         </p:nvSpPr>
-        <p:spPr/>
+        <p:spPr>
+          <a:xfrm>
+            <a:off x="1431234" y="365125"/>
+            <a:ext cx="9922565" cy="1325563"/>
+          </a:xfrm>
+        </p:spPr>
         <p:txBody>
           <a:bodyPr/>
           <a:lstStyle/>
@@ -14566,8 +14161,8 @@
         </p:blipFill>
         <p:spPr>
           <a:xfrm>
-            <a:off x="2493065" y="1591297"/>
-            <a:ext cx="7205870" cy="4802187"/>
+            <a:off x="1709530" y="1591297"/>
+            <a:ext cx="8736496" cy="4802187"/>
           </a:xfrm>
           <a:prstGeom prst="rect">
             <a:avLst/>
@@ -14669,10 +14264,10 @@
         </p:nvGrpSpPr>
         <p:grpSpPr>
           <a:xfrm>
-            <a:off x="286854" y="497567"/>
-            <a:ext cx="11849959" cy="1040512"/>
-            <a:chOff x="-209761" y="-190497"/>
-            <a:chExt cx="12551735" cy="1344976"/>
+            <a:off x="524734" y="1010037"/>
+            <a:ext cx="11881527" cy="726309"/>
+            <a:chOff x="63281" y="-190497"/>
+            <a:chExt cx="12585172" cy="1189012"/>
           </a:xfrm>
         </p:grpSpPr>
         <p:grpSp>
@@ -14777,7 +14372,7 @@
                   </a:spcBef>
                 </a:pPr>
                 <a:r>
-                  <a:rPr lang="en-US" sz="2800" b="1" dirty="0">
+                  <a:rPr lang="en-US" sz="2400" b="1" dirty="0">
                     <a:solidFill>
                       <a:srgbClr val="7030A0"/>
                     </a:solidFill>
@@ -14805,8 +14400,8 @@
           </p:nvSpPr>
           <p:spPr>
             <a:xfrm>
-              <a:off x="-209761" y="501297"/>
-              <a:ext cx="12551735" cy="653182"/>
+              <a:off x="96718" y="498154"/>
+              <a:ext cx="12551735" cy="500361"/>
             </a:xfrm>
             <a:prstGeom prst="rect">
               <a:avLst/>
@@ -14818,7 +14413,7 @@
             </a:bodyPr>
             <a:lstStyle/>
             <a:p>
-              <a:pPr marL="259080" lvl="1" algn="l">
+              <a:pPr marL="259080" lvl="1">
                 <a:lnSpc>
                   <a:spcPts val="3359"/>
                 </a:lnSpc>
@@ -14827,15 +14422,15 @@
                 </a:spcBef>
               </a:pPr>
               <a:r>
-                <a:rPr lang="en-US" sz="2400" dirty="0">
-                  <a:latin typeface="Times New Roman"/>
-                  <a:cs typeface="Times New Roman"/>
+                <a:rPr lang="en-US" sz="2000" dirty="0">
+                  <a:latin typeface="Times New Roman" panose="02020603050405020304" pitchFamily="18" charset="0"/>
+                  <a:cs typeface="Times New Roman" panose="02020603050405020304" pitchFamily="18" charset="0"/>
                 </a:rPr>
-                <a:t>Identifying the key questions ,the goals of the analysis, and the data available to address them.</a:t>
+                <a:t>Define key questions, set analysis goals, and identify available data.</a:t>
               </a:r>
-              <a:endParaRPr lang="en-US" sz="2400" dirty="0">
-                <a:latin typeface="Times New Roman"/>
-                <a:cs typeface="Times New Roman"/>
+              <a:endParaRPr lang="en-US" sz="2000" dirty="0">
+                <a:latin typeface="Times New Roman" panose="02020603050405020304" pitchFamily="18" charset="0"/>
+                <a:cs typeface="Times New Roman" panose="02020603050405020304" pitchFamily="18" charset="0"/>
                 <a:sym typeface="Kollektif"/>
               </a:endParaRPr>
             </a:p>
@@ -14856,10 +14451,10 @@
         </p:nvGrpSpPr>
         <p:grpSpPr>
           <a:xfrm>
-            <a:off x="286854" y="1404349"/>
-            <a:ext cx="10954251" cy="1110347"/>
-            <a:chOff x="-1098916" y="-740618"/>
-            <a:chExt cx="8390125" cy="1638170"/>
+            <a:off x="502912" y="1881212"/>
+            <a:ext cx="10741205" cy="1110347"/>
+            <a:chOff x="-935739" y="-740618"/>
+            <a:chExt cx="8226948" cy="1638170"/>
           </a:xfrm>
         </p:grpSpPr>
         <p:grpSp>
@@ -14876,10 +14471,10 @@
           </p:nvGrpSpPr>
           <p:grpSpPr>
             <a:xfrm>
-              <a:off x="-922070" y="-740618"/>
-              <a:ext cx="8213279" cy="1638170"/>
-              <a:chOff x="-316720" y="-146295"/>
-              <a:chExt cx="1622376" cy="323589"/>
+              <a:off x="-935739" y="-740618"/>
+              <a:ext cx="8226948" cy="1638170"/>
+              <a:chOff x="-319420" y="-146295"/>
+              <a:chExt cx="1625076" cy="323589"/>
             </a:xfrm>
           </p:grpSpPr>
           <p:sp>
@@ -14944,8 +14539,8 @@
             </p:nvSpPr>
             <p:spPr>
               <a:xfrm>
-                <a:off x="-316720" y="-146295"/>
-                <a:ext cx="1622376" cy="163523"/>
+                <a:off x="-319420" y="-146295"/>
+                <a:ext cx="1625076" cy="174938"/>
               </a:xfrm>
               <a:prstGeom prst="rect">
                 <a:avLst/>
@@ -14964,7 +14559,7 @@
                   </a:spcBef>
                 </a:pPr>
                 <a:r>
-                  <a:rPr lang="en-US" sz="2800" b="1" dirty="0">
+                  <a:rPr lang="en-US" sz="2400" b="1" dirty="0">
                     <a:solidFill>
                       <a:srgbClr val="7030A0"/>
                     </a:solidFill>
@@ -14992,8 +14587,8 @@
           </p:nvSpPr>
           <p:spPr>
             <a:xfrm>
-              <a:off x="-1098916" y="-11487"/>
-              <a:ext cx="8213279" cy="588890"/>
+              <a:off x="-906629" y="-11487"/>
+              <a:ext cx="8020992" cy="571106"/>
             </a:xfrm>
             <a:prstGeom prst="rect">
               <a:avLst/>
@@ -15014,7 +14609,7 @@
                 </a:spcBef>
               </a:pPr>
               <a:r>
-                <a:rPr lang="en-US" sz="2400" dirty="0">
+                <a:rPr lang="en-US" sz="2000" dirty="0">
                   <a:latin typeface="Times New Roman"/>
                   <a:cs typeface="Times New Roman"/>
                   <a:sym typeface="Kollektif"/>
@@ -15025,120 +14620,53 @@
           </p:txBody>
         </p:sp>
       </p:grpSp>
-      <p:grpSp>
-        <p:nvGrpSpPr>
-          <p:cNvPr id="85" name="Group 9">
+      <p:sp>
+        <p:nvSpPr>
+          <p:cNvPr id="89" name="TextBox 12">
             <a:extLst>
               <a:ext uri="{FF2B5EF4-FFF2-40B4-BE49-F238E27FC236}">
-                <a16:creationId xmlns:a16="http://schemas.microsoft.com/office/drawing/2014/main" id="{1750787B-9EBA-D19D-A854-0E4C6B960985}"/>
+                <a16:creationId xmlns:a16="http://schemas.microsoft.com/office/drawing/2014/main" id="{968E994F-2A78-37EC-C865-D5926839C401}"/>
               </a:ext>
             </a:extLst>
           </p:cNvPr>
-          <p:cNvGrpSpPr/>
+          <p:cNvSpPr txBox="1"/>
           <p:nvPr/>
-        </p:nvGrpSpPr>
-        <p:grpSpPr>
+        </p:nvSpPr>
+        <p:spPr>
           <a:xfrm>
-            <a:off x="286854" y="2270453"/>
-            <a:ext cx="11425055" cy="1271088"/>
-            <a:chOff x="-255125" y="182203"/>
-            <a:chExt cx="7582524" cy="860063"/>
+            <a:off x="488751" y="2769569"/>
+            <a:ext cx="11200337" cy="470359"/>
           </a:xfrm>
-        </p:grpSpPr>
-        <p:sp>
-          <p:nvSpPr>
-            <p:cNvPr id="89" name="TextBox 12">
-              <a:extLst>
-                <a:ext uri="{FF2B5EF4-FFF2-40B4-BE49-F238E27FC236}">
-                  <a16:creationId xmlns:a16="http://schemas.microsoft.com/office/drawing/2014/main" id="{968E994F-2A78-37EC-C865-D5926839C401}"/>
-                </a:ext>
-              </a:extLst>
-            </p:cNvPr>
-            <p:cNvSpPr txBox="1"/>
-            <p:nvPr/>
-          </p:nvSpPr>
-          <p:spPr>
-            <a:xfrm>
-              <a:off x="-113732" y="182203"/>
-              <a:ext cx="7441131" cy="312440"/>
-            </a:xfrm>
-            <a:prstGeom prst="rect">
-              <a:avLst/>
-            </a:prstGeom>
-          </p:spPr>
-          <p:txBody>
-            <a:bodyPr lIns="50800" tIns="50800" rIns="50800" bIns="50800" rtlCol="0" anchor="ctr"/>
-            <a:lstStyle/>
-            <a:p>
-              <a:pPr marL="0" lvl="0" indent="0" algn="l">
-                <a:lnSpc>
-                  <a:spcPts val="4200"/>
-                </a:lnSpc>
-                <a:spcBef>
-                  <a:spcPct val="0"/>
-                </a:spcBef>
-              </a:pPr>
-              <a:r>
-                <a:rPr lang="en-US" sz="2800" b="1" dirty="0">
-                  <a:solidFill>
-                    <a:srgbClr val="7030A0"/>
-                  </a:solidFill>
-                  <a:latin typeface="Times New Roman"/>
-                  <a:cs typeface="Times New Roman"/>
-                  <a:sym typeface="Lilita One"/>
-                </a:rPr>
-                <a:t>3.Analysis</a:t>
-              </a:r>
-            </a:p>
-          </p:txBody>
-        </p:sp>
-        <p:sp>
-          <p:nvSpPr>
-            <p:cNvPr id="87" name="TextBox 86">
-              <a:extLst>
-                <a:ext uri="{FF2B5EF4-FFF2-40B4-BE49-F238E27FC236}">
-                  <a16:creationId xmlns:a16="http://schemas.microsoft.com/office/drawing/2014/main" id="{B55939D7-3B00-84D0-D7CC-A7195087C277}"/>
-                </a:ext>
-              </a:extLst>
-            </p:cNvPr>
-            <p:cNvSpPr txBox="1"/>
-            <p:nvPr/>
-          </p:nvSpPr>
-          <p:spPr>
-            <a:xfrm>
-              <a:off x="-255125" y="477163"/>
-              <a:ext cx="7462507" cy="565103"/>
-            </a:xfrm>
-            <a:prstGeom prst="rect">
-              <a:avLst/>
-            </a:prstGeom>
-          </p:spPr>
-          <p:txBody>
-            <a:bodyPr wrap="square" lIns="0" tIns="0" rIns="0" bIns="0" rtlCol="0" anchor="t">
-              <a:spAutoFit/>
-            </a:bodyPr>
-            <a:lstStyle/>
-            <a:p>
-              <a:pPr marL="259080" lvl="1">
-                <a:lnSpc>
-                  <a:spcPts val="3359"/>
-                </a:lnSpc>
-                <a:spcBef>
-                  <a:spcPct val="0"/>
-                </a:spcBef>
-              </a:pPr>
-              <a:r>
-                <a:rPr lang="en-US" sz="2400" dirty="0">
-                  <a:latin typeface="Times New Roman"/>
-                  <a:cs typeface="Times New Roman"/>
-                  <a:sym typeface="Kollektif"/>
-                </a:rPr>
-                <a:t>Utilized SQL functions like CTE ,Aggregate Functions , Subqueries , Group by clause, Rank functions and etc. for analysis.</a:t>
-              </a:r>
-            </a:p>
-          </p:txBody>
-        </p:sp>
-      </p:grpSp>
+          <a:prstGeom prst="rect">
+            <a:avLst/>
+          </a:prstGeom>
+        </p:spPr>
+        <p:txBody>
+          <a:bodyPr lIns="50800" tIns="50800" rIns="50800" bIns="50800" rtlCol="0" anchor="ctr"/>
+          <a:lstStyle/>
+          <a:p>
+            <a:pPr marL="0" lvl="0" indent="0" algn="l">
+              <a:lnSpc>
+                <a:spcPts val="4200"/>
+              </a:lnSpc>
+              <a:spcBef>
+                <a:spcPct val="0"/>
+              </a:spcBef>
+            </a:pPr>
+            <a:r>
+              <a:rPr lang="en-US" sz="2400" b="1" dirty="0">
+                <a:solidFill>
+                  <a:srgbClr val="7030A0"/>
+                </a:solidFill>
+                <a:latin typeface="Times New Roman"/>
+                <a:cs typeface="Times New Roman"/>
+                <a:sym typeface="Lilita One"/>
+              </a:rPr>
+              <a:t>3.Analysis</a:t>
+            </a:r>
+          </a:p>
+        </p:txBody>
+      </p:sp>
       <p:grpSp>
         <p:nvGrpSpPr>
           <p:cNvPr id="90" name="Group 4">
@@ -15153,10 +14681,10 @@
         </p:nvGrpSpPr>
         <p:grpSpPr>
           <a:xfrm>
-            <a:off x="286854" y="3282870"/>
-            <a:ext cx="11690430" cy="1505949"/>
-            <a:chOff x="-138490" y="-363378"/>
-            <a:chExt cx="9860837" cy="2007931"/>
+            <a:off x="435851" y="3368472"/>
+            <a:ext cx="11740676" cy="1032230"/>
+            <a:chOff x="8380" y="-1209362"/>
+            <a:chExt cx="9903219" cy="1376306"/>
           </a:xfrm>
         </p:grpSpPr>
         <p:sp>
@@ -15173,7 +14701,7 @@
           </p:nvSpPr>
           <p:spPr>
             <a:xfrm>
-              <a:off x="8377" y="-363378"/>
+              <a:off x="8380" y="-1209362"/>
               <a:ext cx="3511502" cy="1250742"/>
             </a:xfrm>
             <a:prstGeom prst="rect">
@@ -15193,7 +14721,7 @@
                 </a:spcBef>
               </a:pPr>
               <a:r>
-                <a:rPr lang="en-US" sz="2800" b="1" dirty="0">
+                <a:rPr lang="en-US" sz="2400" b="1" dirty="0">
                   <a:solidFill>
                     <a:srgbClr val="7030A0"/>
                   </a:solidFill>
@@ -15220,8 +14748,8 @@
           </p:nvSpPr>
           <p:spPr>
             <a:xfrm>
-              <a:off x="-138490" y="522024"/>
-              <a:ext cx="9860837" cy="1122529"/>
+              <a:off x="268195" y="-202388"/>
+              <a:ext cx="9643404" cy="369332"/>
             </a:xfrm>
             <a:prstGeom prst="rect">
               <a:avLst/>
@@ -15233,34 +14761,24 @@
             </a:bodyPr>
             <a:lstStyle/>
             <a:p>
-              <a:pPr marL="259080" lvl="1" algn="l">
-                <a:lnSpc>
-                  <a:spcPts val="3359"/>
-                </a:lnSpc>
-                <a:spcBef>
-                  <a:spcPct val="0"/>
-                </a:spcBef>
-              </a:pPr>
               <a:r>
-                <a:rPr lang="en-US" sz="2400" dirty="0">
-                  <a:latin typeface="Times New Roman"/>
-                  <a:cs typeface="Times New Roman"/>
+                <a:rPr lang="en-US" dirty="0">
+                  <a:latin typeface="Times New Roman" panose="02020603050405020304" pitchFamily="18" charset="0"/>
+                  <a:cs typeface="Times New Roman" panose="02020603050405020304" pitchFamily="18" charset="0"/>
                 </a:rPr>
-                <a:t>Visualized key metrics such as total posts, likes, and comments Created charts and graphs to rank users based on engagement rates and to highlight the most influential hashtags</a:t>
+                <a:t>Visualized</a:t>
               </a:r>
               <a:r>
-                <a:rPr lang="en-US" sz="2400" dirty="0"/>
-                <a:t>.</a:t>
+                <a:rPr lang="en-US" b="1" dirty="0"/>
+                <a:t> </a:t>
               </a:r>
-              <a:endParaRPr lang="en-US" sz="2400" u="none" dirty="0">
-                <a:solidFill>
-                  <a:srgbClr val="000000"/>
-                </a:solidFill>
-                <a:latin typeface="Kollektif"/>
-                <a:ea typeface="Kollektif"/>
-                <a:cs typeface="Kollektif"/>
-                <a:sym typeface="Kollektif"/>
-              </a:endParaRPr>
+              <a:r>
+                <a:rPr lang="en-US" dirty="0">
+                  <a:latin typeface="Times New Roman" panose="02020603050405020304" pitchFamily="18" charset="0"/>
+                  <a:cs typeface="Times New Roman" panose="02020603050405020304" pitchFamily="18" charset="0"/>
+                </a:rPr>
+                <a:t>metrics (posts, likes, comments) to rank users by engagement and highlight top hashtags.</a:t>
+              </a:r>
             </a:p>
           </p:txBody>
         </p:sp>
@@ -15279,10 +14797,10 @@
         </p:nvGrpSpPr>
         <p:grpSpPr>
           <a:xfrm>
-            <a:off x="286854" y="4719029"/>
-            <a:ext cx="11886750" cy="1106212"/>
-            <a:chOff x="-847078" y="-215192"/>
-            <a:chExt cx="9213785" cy="962963"/>
+            <a:off x="460974" y="4399716"/>
+            <a:ext cx="11886750" cy="933072"/>
+            <a:chOff x="-697476" y="-276608"/>
+            <a:chExt cx="9213785" cy="812243"/>
           </a:xfrm>
         </p:grpSpPr>
         <p:sp>
@@ -15299,7 +14817,7 @@
           </p:nvSpPr>
           <p:spPr>
             <a:xfrm>
-              <a:off x="-695771" y="-215192"/>
+              <a:off x="-693490" y="-276608"/>
               <a:ext cx="2552052" cy="561614"/>
             </a:xfrm>
             <a:prstGeom prst="rect">
@@ -15319,24 +14837,37 @@
                 </a:spcBef>
               </a:pPr>
               <a:r>
-                <a:rPr lang="en-US" sz="2800" b="1" dirty="0">
+                <a:rPr lang="en-US" sz="2400" b="1" dirty="0">
                   <a:solidFill>
                     <a:srgbClr val="7030A0"/>
                   </a:solidFill>
+                  <a:latin typeface="Times New Roman" panose="02020603050405020304" pitchFamily="18" charset="0"/>
+                  <a:cs typeface="Times New Roman" panose="02020603050405020304" pitchFamily="18" charset="0"/>
                   <a:sym typeface="Lilita One"/>
                 </a:rPr>
-                <a:t>5</a:t>
+                <a:t>5.S</a:t>
               </a:r>
               <a:r>
-                <a:rPr lang="en-US" sz="2800" b="1" dirty="0">
+                <a:rPr lang="en-IN" sz="2400" b="1" dirty="0" err="1">
                   <a:solidFill>
                     <a:srgbClr val="7030A0"/>
                   </a:solidFill>
-                  <a:latin typeface="Times New Roman"/>
-                  <a:cs typeface="Times New Roman"/>
+                  <a:latin typeface="Times New Roman" panose="02020603050405020304" pitchFamily="18" charset="0"/>
+                  <a:cs typeface="Times New Roman" panose="02020603050405020304" pitchFamily="18" charset="0"/>
                   <a:sym typeface="Lilita One"/>
                 </a:rPr>
-                <a:t>.Stagegy Making</a:t>
+                <a:t>trategy</a:t>
+              </a:r>
+              <a:r>
+                <a:rPr lang="en-US" sz="2400" b="1" dirty="0">
+                  <a:solidFill>
+                    <a:srgbClr val="7030A0"/>
+                  </a:solidFill>
+                  <a:latin typeface="Times New Roman" panose="02020603050405020304" pitchFamily="18" charset="0"/>
+                  <a:cs typeface="Times New Roman" panose="02020603050405020304" pitchFamily="18" charset="0"/>
+                  <a:sym typeface="Lilita One"/>
+                </a:rPr>
+                <a:t> Making</a:t>
               </a:r>
             </a:p>
           </p:txBody>
@@ -15355,8 +14886,8 @@
           </p:nvSpPr>
           <p:spPr>
             <a:xfrm>
-              <a:off x="-847078" y="275727"/>
-              <a:ext cx="9213785" cy="472044"/>
+              <a:off x="-697476" y="198668"/>
+              <a:ext cx="9213785" cy="336967"/>
             </a:xfrm>
             <a:prstGeom prst="rect">
               <a:avLst/>
@@ -15377,7 +14908,7 @@
                 </a:spcBef>
               </a:pPr>
               <a:r>
-                <a:rPr lang="en-US" sz="2400" dirty="0">
+                <a:rPr lang="en-US" sz="2000" dirty="0">
                   <a:latin typeface="Times New Roman"/>
                   <a:cs typeface="Times New Roman"/>
                   <a:sym typeface="Kollektif"/>
@@ -15402,10 +14933,10 @@
         </p:nvGrpSpPr>
         <p:grpSpPr>
           <a:xfrm>
-            <a:off x="250784" y="5558774"/>
-            <a:ext cx="11690430" cy="1070996"/>
-            <a:chOff x="-884567" y="-228880"/>
-            <a:chExt cx="8638194" cy="1629470"/>
+            <a:off x="460974" y="5238615"/>
+            <a:ext cx="11690430" cy="1008496"/>
+            <a:chOff x="-755908" y="-215500"/>
+            <a:chExt cx="8638194" cy="1534379"/>
           </a:xfrm>
         </p:grpSpPr>
         <p:sp>
@@ -15422,7 +14953,7 @@
           </p:nvSpPr>
           <p:spPr>
             <a:xfrm>
-              <a:off x="-755908" y="-228880"/>
+              <a:off x="-755908" y="-215500"/>
               <a:ext cx="2160270" cy="1153754"/>
             </a:xfrm>
             <a:prstGeom prst="rect">
@@ -15442,7 +14973,7 @@
                 </a:spcBef>
               </a:pPr>
               <a:r>
-                <a:rPr lang="en-US" sz="2800" b="1" dirty="0">
+                <a:rPr lang="en-US" sz="2400" b="1" dirty="0">
                   <a:solidFill>
                     <a:srgbClr val="7030A0"/>
                   </a:solidFill>
@@ -15469,7 +15000,7 @@
           </p:nvSpPr>
           <p:spPr>
             <a:xfrm>
-              <a:off x="-884567" y="793305"/>
+              <a:off x="-755908" y="711594"/>
               <a:ext cx="8638194" cy="607285"/>
             </a:xfrm>
             <a:prstGeom prst="rect">
@@ -15491,7 +15022,7 @@
                 </a:spcBef>
               </a:pPr>
               <a:r>
-                <a:rPr lang="en-US" sz="2400" dirty="0">
+                <a:rPr lang="en-US" sz="2000" dirty="0">
                   <a:latin typeface="Times New Roman"/>
                   <a:cs typeface="Times New Roman"/>
                   <a:sym typeface="Kollektif"/>
@@ -15499,7 +15030,7 @@
                 <a:t>Implementation of the plans and strategy are also discussed for </a:t>
               </a:r>
               <a:r>
-                <a:rPr lang="en-US" sz="2400" dirty="0" err="1">
+                <a:rPr lang="en-US" sz="2000" dirty="0" err="1">
                   <a:latin typeface="Times New Roman"/>
                   <a:cs typeface="Times New Roman"/>
                   <a:sym typeface="Kollektif"/>
@@ -15507,7 +15038,7 @@
                 <a:t>optimised</a:t>
               </a:r>
               <a:r>
-                <a:rPr lang="en-US" sz="2400" dirty="0">
+                <a:rPr lang="en-US" sz="2000" dirty="0">
                   <a:latin typeface="Times New Roman"/>
                   <a:cs typeface="Times New Roman"/>
                   <a:sym typeface="Kollektif"/>
@@ -15518,6 +15049,104 @@
           </p:txBody>
         </p:sp>
       </p:grpSp>
+      <p:sp>
+        <p:nvSpPr>
+          <p:cNvPr id="5" name="Rectangle 3">
+            <a:extLst>
+              <a:ext uri="{FF2B5EF4-FFF2-40B4-BE49-F238E27FC236}">
+                <a16:creationId xmlns:a16="http://schemas.microsoft.com/office/drawing/2014/main" id="{4BAFB3DD-00E0-5BAA-D109-CD46010ECC7B}"/>
+              </a:ext>
+            </a:extLst>
+          </p:cNvPr>
+          <p:cNvSpPr>
+            <a:spLocks noChangeArrowheads="1"/>
+          </p:cNvSpPr>
+          <p:nvPr/>
+        </p:nvSpPr>
+        <p:spPr bwMode="auto">
+          <a:xfrm>
+            <a:off x="743872" y="3190980"/>
+            <a:ext cx="9521233" cy="400110"/>
+          </a:xfrm>
+          <a:prstGeom prst="rect">
+            <a:avLst/>
+          </a:prstGeom>
+          <a:noFill/>
+          <a:ln>
+            <a:noFill/>
+          </a:ln>
+          <a:effectLst/>
+          <a:extLst>
+            <a:ext uri="{909E8E84-426E-40DD-AFC4-6F175D3DCCD1}">
+              <a14:hiddenFill xmlns:a14="http://schemas.microsoft.com/office/drawing/2010/main">
+                <a:solidFill>
+                  <a:schemeClr val="accent1"/>
+                </a:solidFill>
+              </a14:hiddenFill>
+            </a:ext>
+            <a:ext uri="{91240B29-F687-4F45-9708-019B960494DF}">
+              <a14:hiddenLine xmlns:a14="http://schemas.microsoft.com/office/drawing/2010/main" w="9525">
+                <a:solidFill>
+                  <a:schemeClr val="tx1"/>
+                </a:solidFill>
+                <a:miter lim="800000"/>
+                <a:headEnd/>
+                <a:tailEnd/>
+              </a14:hiddenLine>
+            </a:ext>
+            <a:ext uri="{AF507438-7753-43E0-B8FC-AC1667EBCBE1}">
+              <a14:hiddenEffects xmlns:a14="http://schemas.microsoft.com/office/drawing/2010/main">
+                <a:effectLst>
+                  <a:outerShdw dist="35921" dir="2700000" algn="ctr" rotWithShape="0">
+                    <a:schemeClr val="bg2"/>
+                  </a:outerShdw>
+                </a:effectLst>
+              </a14:hiddenEffects>
+            </a:ext>
+          </a:extLst>
+        </p:spPr>
+        <p:txBody>
+          <a:bodyPr vert="horz" wrap="square" lIns="91440" tIns="45720" rIns="91440" bIns="45720" numCol="1" anchor="ctr" anchorCtr="0" compatLnSpc="1">
+            <a:prstTxWarp prst="textNoShape">
+              <a:avLst/>
+            </a:prstTxWarp>
+            <a:spAutoFit/>
+          </a:bodyPr>
+          <a:lstStyle/>
+          <a:p>
+            <a:pPr marL="0" marR="0" lvl="0" indent="0" algn="l" defTabSz="914400" rtl="0" eaLnBrk="0" fontAlgn="base" latinLnBrk="0" hangingPunct="0">
+              <a:lnSpc>
+                <a:spcPct val="100000"/>
+              </a:lnSpc>
+              <a:spcBef>
+                <a:spcPct val="0"/>
+              </a:spcBef>
+              <a:spcAft>
+                <a:spcPct val="0"/>
+              </a:spcAft>
+              <a:buClrTx/>
+              <a:buSzTx/>
+              <a:buFontTx/>
+              <a:buNone/>
+              <a:tabLst/>
+            </a:pPr>
+            <a:r>
+              <a:rPr kumimoji="0" lang="en-US" altLang="en-US" sz="2000" i="0" u="none" strike="noStrike" cap="none" normalizeH="0" baseline="0" dirty="0">
+                <a:ln>
+                  <a:noFill/>
+                </a:ln>
+                <a:solidFill>
+                  <a:schemeClr val="tx1"/>
+                </a:solidFill>
+                <a:effectLst/>
+                <a:latin typeface="Times New Roman" panose="02020603050405020304" pitchFamily="18" charset="0"/>
+                <a:cs typeface="Times New Roman" panose="02020603050405020304" pitchFamily="18" charset="0"/>
+              </a:rPr>
+              <a:t>Used SQL functions (CTE, aggregates, subqueries, GROUP BY, RANK, etc.) for analysis.</a:t>
+            </a:r>
+          </a:p>
+        </p:txBody>
+      </p:sp>
     </p:spTree>
     <p:extLst>
       <p:ext uri="{BB962C8B-B14F-4D97-AF65-F5344CB8AC3E}">
@@ -16554,7 +16183,7 @@
             <p:ph sz="half" idx="2"/>
             <p:extLst>
               <p:ext uri="{D42A27DB-BD31-4B8C-83A1-F6EECF244321}">
-                <p14:modId xmlns:p14="http://schemas.microsoft.com/office/powerpoint/2010/main" val="1252299697"/>
+                <p14:modId xmlns:p14="http://schemas.microsoft.com/office/powerpoint/2010/main" val="945926683"/>
               </p:ext>
             </p:extLst>
           </p:nvPr>
